--- a/deliverables/RELAY_Presentation.pptx
+++ b/deliverables/RELAY_Presentation.pptx
@@ -4,9 +4,6 @@
   <p:sldMasterIdLst>
     <p:sldMasterId id="2147483648" r:id="rId1"/>
   </p:sldMasterIdLst>
-  <p:notesMasterIdLst>
-    <p:notesMasterId r:id="rId16"/>
-  </p:notesMasterIdLst>
   <p:sldIdLst>
     <p:sldId id="256" r:id="rId2"/>
     <p:sldId id="257" r:id="rId3"/>
@@ -23,7 +20,10 @@
     <p:sldId id="268" r:id="rId14"/>
     <p:sldId id="269" r:id="rId15"/>
   </p:sldIdLst>
-  <p:sldSz cx="9144000" cy="5143500" type="screen16x9"/>
+  <p:notesMasterIdLst>
+    <p:notesMasterId r:id="rId16"/>
+  </p:notesMasterIdLst>
+  <p:sldSz cx="9144000" cy="5143500"/>
   <p:notesSz cx="5143500" cy="9144000"/>
   <p:defaultTextStyle>
     <a:lvl1pPr marL="0" algn="l" defTabSz="914400" rtl="0" eaLnBrk="1" latinLnBrk="0" hangingPunct="1">
@@ -117,11 +117,6 @@
       </a:defRPr>
     </a:lvl9pPr>
   </p:defaultTextStyle>
-  <p:extLst>
-    <p:ext uri="{EFAFB233-063F-42B5-8137-9DF3F51BA10A}">
-      <p15:sldGuideLst xmlns:p15="http://schemas.microsoft.com/office/powerpoint/2012/main"/>
-    </p:ext>
-  </p:extLst>
 </p:presentation>
 </file>
 
@@ -147,10 +142,234 @@
           <a:chExt cx="0" cy="0"/>
         </a:xfrm>
       </p:grpSpPr>
+      <p:sp>
+        <p:nvSpPr>
+          <p:cNvPr id="2" name="Header Placeholder 1"/>
+          <p:cNvSpPr>
+            <a:spLocks noGrp="1"/>
+          </p:cNvSpPr>
+          <p:nvPr>
+            <p:ph type="hdr" sz="quarter"/>
+          </p:nvPr>
+        </p:nvSpPr>
+        <p:spPr>
+          <a:xfrm>
+            <a:off x="0" y="0"/>
+            <a:ext cx="2971800" cy="458788"/>
+          </a:xfrm>
+          <a:prstGeom prst="rect">
+            <a:avLst/>
+          </a:prstGeom>
+        </p:spPr>
+        <p:txBody>
+          <a:bodyPr vert="horz" lIns="91440" tIns="45720" rIns="91440" bIns="45720" rtlCol="0"/>
+          <a:lstStyle>
+            <a:lvl1pPr algn="l">
+              <a:defRPr sz="1200"/>
+            </a:lvl1pPr>
+          </a:lstStyle>
+          <a:p>
+            <a:endParaRPr lang="en-US"/>
+          </a:p>
+        </p:txBody>
+      </p:sp>
+      <p:sp>
+        <p:nvSpPr>
+          <p:cNvPr id="3" name="Date Placeholder 2"/>
+          <p:cNvSpPr>
+            <a:spLocks noGrp="1"/>
+          </p:cNvSpPr>
+          <p:nvPr>
+            <p:ph type="dt" idx="1"/>
+          </p:nvPr>
+        </p:nvSpPr>
+        <p:spPr>
+          <a:xfrm>
+            <a:off x="3884613" y="0"/>
+            <a:ext cx="2971800" cy="458788"/>
+          </a:xfrm>
+          <a:prstGeom prst="rect">
+            <a:avLst/>
+          </a:prstGeom>
+        </p:spPr>
+        <p:txBody>
+          <a:bodyPr vert="horz" lIns="91440" tIns="45720" rIns="91440" bIns="45720" rtlCol="0"/>
+          <a:lstStyle>
+            <a:lvl1pPr algn="r">
+              <a:defRPr sz="1200"/>
+            </a:lvl1pPr>
+          </a:lstStyle>
+          <a:p>
+            <a:fld id="{5282F153-3F37-0F45-9E97-73ACFA13230C}" type="datetimeFigureOut">
+              <a:rPr lang="en-US"/>
+              <a:t>7/23/19</a:t>
+            </a:fld>
+            <a:endParaRPr lang="en-US"/>
+          </a:p>
+        </p:txBody>
+      </p:sp>
+      <p:sp>
+        <p:nvSpPr>
+          <p:cNvPr id="4" name="Slide Image Placeholder 3"/>
+          <p:cNvSpPr>
+            <a:spLocks noGrp="1" noRot="1" noChangeAspect="1"/>
+          </p:cNvSpPr>
+          <p:nvPr>
+            <p:ph type="sldImg" idx="2"/>
+          </p:nvPr>
+        </p:nvSpPr>
+        <p:spPr>
+          <a:xfrm>
+            <a:off x="685800" y="1143000"/>
+            <a:ext cx="5486400" cy="3086100"/>
+          </a:xfrm>
+          <a:prstGeom prst="rect">
+            <a:avLst/>
+          </a:prstGeom>
+          <a:noFill/>
+          <a:ln w="12700">
+            <a:solidFill>
+              <a:prstClr val="black"/>
+            </a:solidFill>
+          </a:ln>
+        </p:spPr>
+        <p:txBody>
+          <a:bodyPr vert="horz" lIns="91440" tIns="45720" rIns="91440" bIns="45720" rtlCol="0" anchor="ctr"/>
+          <a:lstStyle/>
+          <a:p>
+            <a:endParaRPr lang="en-US"/>
+          </a:p>
+        </p:txBody>
+      </p:sp>
+      <p:sp>
+        <p:nvSpPr>
+          <p:cNvPr id="5" name="Notes Placeholder 4"/>
+          <p:cNvSpPr>
+            <a:spLocks noGrp="1"/>
+          </p:cNvSpPr>
+          <p:nvPr>
+            <p:ph type="body" sz="quarter" idx="3"/>
+          </p:nvPr>
+        </p:nvSpPr>
+        <p:spPr>
+          <a:xfrm>
+            <a:off x="685800" y="4400550"/>
+            <a:ext cx="5486400" cy="3600450"/>
+          </a:xfrm>
+          <a:prstGeom prst="rect">
+            <a:avLst/>
+          </a:prstGeom>
+        </p:spPr>
+        <p:txBody>
+          <a:bodyPr vert="horz" lIns="91440" tIns="45720" rIns="91440" bIns="45720" rtlCol="0"/>
+          <a:lstStyle/>
+          <a:p>
+            <a:pPr lvl="0"/>
+            <a:r>
+              <a:rPr lang="en-US"/>
+              <a:t>Click to edit Master text styles</a:t>
+            </a:r>
+          </a:p>
+          <a:p>
+            <a:pPr lvl="1"/>
+            <a:r>
+              <a:rPr lang="en-US"/>
+              <a:t>Second level</a:t>
+            </a:r>
+          </a:p>
+          <a:p>
+            <a:pPr lvl="2"/>
+            <a:r>
+              <a:rPr lang="en-US"/>
+              <a:t>Third level</a:t>
+            </a:r>
+          </a:p>
+          <a:p>
+            <a:pPr lvl="3"/>
+            <a:r>
+              <a:rPr lang="en-US"/>
+              <a:t>Fourth level</a:t>
+            </a:r>
+          </a:p>
+          <a:p>
+            <a:pPr lvl="4"/>
+            <a:r>
+              <a:rPr lang="en-US"/>
+              <a:t>Fifth level</a:t>
+            </a:r>
+          </a:p>
+        </p:txBody>
+      </p:sp>
+      <p:sp>
+        <p:nvSpPr>
+          <p:cNvPr id="6" name="Footer Placeholder 5"/>
+          <p:cNvSpPr>
+            <a:spLocks noGrp="1"/>
+          </p:cNvSpPr>
+          <p:nvPr>
+            <p:ph type="ftr" sz="quarter" idx="4"/>
+          </p:nvPr>
+        </p:nvSpPr>
+        <p:spPr>
+          <a:xfrm>
+            <a:off x="0" y="8685213"/>
+            <a:ext cx="2971800" cy="458787"/>
+          </a:xfrm>
+          <a:prstGeom prst="rect">
+            <a:avLst/>
+          </a:prstGeom>
+        </p:spPr>
+        <p:txBody>
+          <a:bodyPr vert="horz" lIns="91440" tIns="45720" rIns="91440" bIns="45720" rtlCol="0" anchor="b"/>
+          <a:lstStyle>
+            <a:lvl1pPr algn="l">
+              <a:defRPr sz="1200"/>
+            </a:lvl1pPr>
+          </a:lstStyle>
+          <a:p>
+            <a:endParaRPr lang="en-US"/>
+          </a:p>
+        </p:txBody>
+      </p:sp>
+      <p:sp>
+        <p:nvSpPr>
+          <p:cNvPr id="7" name="Slide Number Placeholder 6"/>
+          <p:cNvSpPr>
+            <a:spLocks noGrp="1"/>
+          </p:cNvSpPr>
+          <p:nvPr>
+            <p:ph type="sldNum" sz="quarter" idx="5"/>
+          </p:nvPr>
+        </p:nvSpPr>
+        <p:spPr>
+          <a:xfrm>
+            <a:off x="3884613" y="8685213"/>
+            <a:ext cx="2971800" cy="458787"/>
+          </a:xfrm>
+          <a:prstGeom prst="rect">
+            <a:avLst/>
+          </a:prstGeom>
+        </p:spPr>
+        <p:txBody>
+          <a:bodyPr vert="horz" lIns="91440" tIns="45720" rIns="91440" bIns="45720" rtlCol="0" anchor="b"/>
+          <a:lstStyle>
+            <a:lvl1pPr algn="r">
+              <a:defRPr sz="1200"/>
+            </a:lvl1pPr>
+          </a:lstStyle>
+          <a:p>
+            <a:fld id="{CE5E9CC1-C706-0F49-92D6-E571CC5EEA8F}" type="slidenum">
+              <a:rPr lang="en-US"/>
+              <a:t>‹#›</a:t>
+            </a:fld>
+            <a:endParaRPr lang="en-US"/>
+          </a:p>
+        </p:txBody>
+      </p:sp>
     </p:spTree>
     <p:extLst>
       <p:ext uri="{BB962C8B-B14F-4D97-AF65-F5344CB8AC3E}">
-        <p14:creationId xmlns:p14="http://schemas.microsoft.com/office/powerpoint/2010/main" val="962988512"/>
+        <p14:creationId xmlns:p14="http://schemas.microsoft.com/office/powerpoint/2010/main" val="1024086991"/>
       </p:ext>
     </p:extLst>
   </p:cSld>
@@ -294,6 +513,10 @@
           <a:bodyPr/>
           <a:lstStyle/>
           <a:p>
+            <a:r>
+              <a:rPr lang="en-US" dirty="0"/>
+              <a:t/>
+            </a:r>
             <a:endParaRPr lang="en-US" dirty="0"/>
           </a:p>
         </p:txBody>
@@ -378,6 +601,10 @@
           <a:bodyPr/>
           <a:lstStyle/>
           <a:p>
+            <a:r>
+              <a:rPr lang="en-US" dirty="0"/>
+              <a:t/>
+            </a:r>
             <a:endParaRPr lang="en-US" dirty="0"/>
           </a:p>
         </p:txBody>
@@ -462,6 +689,10 @@
           <a:bodyPr/>
           <a:lstStyle/>
           <a:p>
+            <a:r>
+              <a:rPr lang="en-US" dirty="0"/>
+              <a:t/>
+            </a:r>
             <a:endParaRPr lang="en-US" dirty="0"/>
           </a:p>
         </p:txBody>
@@ -546,6 +777,10 @@
           <a:bodyPr/>
           <a:lstStyle/>
           <a:p>
+            <a:r>
+              <a:rPr lang="en-US" dirty="0"/>
+              <a:t/>
+            </a:r>
             <a:endParaRPr lang="en-US" dirty="0"/>
           </a:p>
         </p:txBody>
@@ -630,6 +865,10 @@
           <a:bodyPr/>
           <a:lstStyle/>
           <a:p>
+            <a:r>
+              <a:rPr lang="en-US" dirty="0"/>
+              <a:t/>
+            </a:r>
             <a:endParaRPr lang="en-US" dirty="0"/>
           </a:p>
         </p:txBody>
@@ -714,6 +953,10 @@
           <a:bodyPr/>
           <a:lstStyle/>
           <a:p>
+            <a:r>
+              <a:rPr lang="en-US" dirty="0"/>
+              <a:t/>
+            </a:r>
             <a:endParaRPr lang="en-US" dirty="0"/>
           </a:p>
         </p:txBody>
@@ -798,6 +1041,10 @@
           <a:bodyPr/>
           <a:lstStyle/>
           <a:p>
+            <a:r>
+              <a:rPr lang="en-US" dirty="0"/>
+              <a:t/>
+            </a:r>
             <a:endParaRPr lang="en-US" dirty="0"/>
           </a:p>
         </p:txBody>
@@ -882,6 +1129,10 @@
           <a:bodyPr/>
           <a:lstStyle/>
           <a:p>
+            <a:r>
+              <a:rPr lang="en-US" dirty="0"/>
+              <a:t/>
+            </a:r>
             <a:endParaRPr lang="en-US" dirty="0"/>
           </a:p>
         </p:txBody>
@@ -966,6 +1217,10 @@
           <a:bodyPr/>
           <a:lstStyle/>
           <a:p>
+            <a:r>
+              <a:rPr lang="en-US" dirty="0"/>
+              <a:t/>
+            </a:r>
             <a:endParaRPr lang="en-US" dirty="0"/>
           </a:p>
         </p:txBody>
@@ -1050,6 +1305,10 @@
           <a:bodyPr/>
           <a:lstStyle/>
           <a:p>
+            <a:r>
+              <a:rPr lang="en-US" dirty="0"/>
+              <a:t/>
+            </a:r>
             <a:endParaRPr lang="en-US" dirty="0"/>
           </a:p>
         </p:txBody>
@@ -1134,6 +1393,10 @@
           <a:bodyPr/>
           <a:lstStyle/>
           <a:p>
+            <a:r>
+              <a:rPr lang="en-US" dirty="0"/>
+              <a:t/>
+            </a:r>
             <a:endParaRPr lang="en-US" dirty="0"/>
           </a:p>
         </p:txBody>
@@ -1218,6 +1481,10 @@
           <a:bodyPr/>
           <a:lstStyle/>
           <a:p>
+            <a:r>
+              <a:rPr lang="en-US" dirty="0"/>
+              <a:t/>
+            </a:r>
             <a:endParaRPr lang="en-US" dirty="0"/>
           </a:p>
         </p:txBody>
@@ -1302,6 +1569,10 @@
           <a:bodyPr/>
           <a:lstStyle/>
           <a:p>
+            <a:r>
+              <a:rPr lang="en-US" dirty="0"/>
+              <a:t/>
+            </a:r>
             <a:endParaRPr lang="en-US" dirty="0"/>
           </a:p>
         </p:txBody>
@@ -1386,6 +1657,10 @@
           <a:bodyPr/>
           <a:lstStyle/>
           <a:p>
+            <a:r>
+              <a:rPr lang="en-US" dirty="0"/>
+              <a:t/>
+            </a:r>
             <a:endParaRPr lang="en-US" dirty="0"/>
           </a:p>
         </p:txBody>
@@ -1459,11 +1734,6 @@
 <file path=ppt/slideMasters/slideMaster1.xml><?xml version="1.0" encoding="utf-8"?>
 <p:sldMaster xmlns:a="http://schemas.openxmlformats.org/drawingml/2006/main" xmlns:r="http://schemas.openxmlformats.org/officeDocument/2006/relationships" xmlns:p="http://schemas.openxmlformats.org/presentationml/2006/main">
   <p:cSld>
-    <p:bg>
-      <p:bgRef idx="1001">
-        <a:schemeClr val="bg1"/>
-      </p:bgRef>
-    </p:bg>
     <p:spTree>
       <p:nvGrpSpPr>
         <p:cNvPr id="1" name=""/>
@@ -1774,13 +2044,6 @@
           </a:solidFill>
           <a:ln/>
         </p:spPr>
-        <p:txBody>
-          <a:bodyPr/>
-          <a:lstStyle/>
-          <a:p>
-            <a:endParaRPr lang="en-US"/>
-          </a:p>
-        </p:txBody>
       </p:sp>
       <p:sp>
         <p:nvSpPr>
@@ -1803,7 +2066,7 @@
           <a:bodyPr wrap="square" lIns="0" tIns="0" rIns="0" bIns="0" rtlCol="0" anchor="ctr"/>
           <a:lstStyle/>
           <a:p>
-            <a:pPr marL="0" indent="0">
+            <a:pPr indent="0" marL="0">
               <a:buNone/>
             </a:pPr>
             <a:r>
@@ -1842,7 +2105,7 @@
           <a:bodyPr wrap="square" lIns="0" tIns="0" rIns="0" bIns="0" rtlCol="0" anchor="ctr"/>
           <a:lstStyle/>
           <a:p>
-            <a:pPr marL="0" indent="0">
+            <a:pPr indent="0" marL="0">
               <a:buNone/>
             </a:pPr>
             <a:r>
@@ -1869,19 +2132,19 @@
         <p:spPr>
           <a:xfrm>
             <a:off x="457200" y="2377440"/>
-            <a:ext cx="4114800" cy="640080"/>
-          </a:xfrm>
-          <a:prstGeom prst="rect">
-            <a:avLst/>
-          </a:prstGeom>
-          <a:noFill/>
-          <a:ln/>
-        </p:spPr>
-        <p:txBody>
-          <a:bodyPr wrap="square" lIns="0" tIns="0" rIns="0" bIns="0" rtlCol="0" anchor="ctr"/>
-          <a:lstStyle/>
-          <a:p>
-            <a:pPr marL="0" indent="0">
+            <a:ext cx="7772400" cy="640080"/>
+          </a:xfrm>
+          <a:prstGeom prst="rect">
+            <a:avLst/>
+          </a:prstGeom>
+          <a:noFill/>
+          <a:ln/>
+        </p:spPr>
+        <p:txBody>
+          <a:bodyPr wrap="square" lIns="0" tIns="0" rIns="0" bIns="0" rtlCol="0" anchor="ctr"/>
+          <a:lstStyle/>
+          <a:p>
+            <a:pPr indent="0" marL="0">
               <a:buNone/>
             </a:pPr>
             <a:r>
@@ -1893,46 +2156,63 @@
                 <a:ea typeface="Calibri" pitchFamily="34" charset="-122"/>
                 <a:cs typeface="Calibri" pitchFamily="34" charset="-120"/>
               </a:rPr>
-              <a:t>Protect transshipment connections when the schedule breaks with agentic orchestration and human gates on high-impact moves</a:t>
+              <a:t>When feeder ETAs slip or cranes go down, RELAY finds at-risk transshipment</a:t>
             </a:r>
             <a:endParaRPr lang="en-US" sz="1600" dirty="0"/>
           </a:p>
-        </p:txBody>
-      </p:sp>
-      <p:sp>
-        <p:nvSpPr>
-          <p:cNvPr id="6" name="Text 4"/>
-          <p:cNvSpPr/>
-          <p:nvPr/>
-        </p:nvSpPr>
-        <p:spPr>
-          <a:xfrm>
-            <a:off x="457200" y="4434840"/>
-            <a:ext cx="8229600" cy="228600"/>
-          </a:xfrm>
-          <a:prstGeom prst="rect">
-            <a:avLst/>
-          </a:prstGeom>
-          <a:noFill/>
-          <a:ln/>
-        </p:spPr>
-        <p:txBody>
-          <a:bodyPr wrap="square" lIns="0" tIns="0" rIns="0" bIns="0" rtlCol="0" anchor="ctr"/>
-          <a:lstStyle/>
-          <a:p>
-            <a:pPr marL="0" indent="0">
-              <a:buNone/>
-            </a:pPr>
-            <a:r>
-              <a:rPr lang="en-US" sz="1100" dirty="0">
-                <a:solidFill>
-                  <a:srgbClr val="8FB8D4"/>
+          <a:p>
+            <a:pPr indent="0" marL="0">
+              <a:buNone/>
+            </a:pPr>
+            <a:r>
+              <a:rPr lang="en-US" sz="1600" dirty="0">
+                <a:solidFill>
+                  <a:srgbClr val="D6E4EE"/>
                 </a:solidFill>
                 <a:latin typeface="Calibri" pitchFamily="34" charset="0"/>
                 <a:ea typeface="Calibri" pitchFamily="34" charset="-122"/>
                 <a:cs typeface="Calibri" pitchFamily="34" charset="-120"/>
               </a:rPr>
-              <a:t>Submission deliverable </a:t>
+              <a:t>connections and plans recovery — with a planner in the loop before anything moves in the yard</a:t>
+            </a:r>
+            <a:endParaRPr lang="en-US" sz="1600" dirty="0"/>
+          </a:p>
+        </p:txBody>
+      </p:sp>
+      <p:sp>
+        <p:nvSpPr>
+          <p:cNvPr id="6" name="Text 4"/>
+          <p:cNvSpPr/>
+          <p:nvPr/>
+        </p:nvSpPr>
+        <p:spPr>
+          <a:xfrm>
+            <a:off x="457200" y="4434840"/>
+            <a:ext cx="8229600" cy="228600"/>
+          </a:xfrm>
+          <a:prstGeom prst="rect">
+            <a:avLst/>
+          </a:prstGeom>
+          <a:noFill/>
+          <a:ln/>
+        </p:spPr>
+        <p:txBody>
+          <a:bodyPr wrap="square" lIns="0" tIns="0" rIns="0" bIns="0" rtlCol="0" anchor="ctr"/>
+          <a:lstStyle/>
+          <a:p>
+            <a:pPr indent="0" marL="0">
+              <a:buNone/>
+            </a:pPr>
+            <a:r>
+              <a:rPr lang="en-US" sz="1100" dirty="0">
+                <a:solidFill>
+                  <a:srgbClr val="8FB8D4"/>
+                </a:solidFill>
+                <a:latin typeface="Calibri" pitchFamily="34" charset="0"/>
+                <a:ea typeface="Calibri" pitchFamily="34" charset="-122"/>
+                <a:cs typeface="Calibri" pitchFamily="34" charset="-120"/>
+              </a:rPr>
+              <a:t>Submission deliverable  ·  Confidential</a:t>
             </a:r>
             <a:endParaRPr lang="en-US" sz="1100" dirty="0"/>
           </a:p>
@@ -1982,13 +2262,6 @@
           </a:solidFill>
           <a:ln/>
         </p:spPr>
-        <p:txBody>
-          <a:bodyPr/>
-          <a:lstStyle/>
-          <a:p>
-            <a:endParaRPr lang="en-US"/>
-          </a:p>
-        </p:txBody>
       </p:sp>
       <p:sp>
         <p:nvSpPr>
@@ -2011,7 +2284,7 @@
           <a:bodyPr wrap="square" lIns="0" tIns="0" rIns="0" bIns="0" rtlCol="0" anchor="ctr"/>
           <a:lstStyle/>
           <a:p>
-            <a:pPr marL="0" indent="0">
+            <a:pPr indent="0" marL="0">
               <a:buNone/>
             </a:pPr>
             <a:r>
@@ -2023,7 +2296,7 @@
                 <a:ea typeface="Arial" pitchFamily="34" charset="-122"/>
                 <a:cs typeface="Arial" pitchFamily="34" charset="-120"/>
               </a:rPr>
-              <a:t>RELAY is built to the brief’s four criteria — ready for a live scenario walkthrough</a:t>
+              <a:t>RELAY — connection recovery with human gates and a full audit trail</a:t>
             </a:r>
             <a:endParaRPr lang="en-US" sz="1800" dirty="0"/>
           </a:p>
@@ -2050,7 +2323,7 @@
           <a:bodyPr wrap="square" lIns="0" tIns="0" rIns="0" bIns="0" rtlCol="0" anchor="ctr"/>
           <a:lstStyle/>
           <a:p>
-            <a:pPr marL="0" indent="0">
+            <a:pPr indent="0" marL="0">
               <a:buNone/>
             </a:pPr>
             <a:r>
@@ -2089,7 +2362,7 @@
           <a:bodyPr wrap="square" lIns="0" tIns="0" rIns="0" bIns="0" rtlCol="0" anchor="ctr"/>
           <a:lstStyle/>
           <a:p>
-            <a:pPr marL="0" indent="0">
+            <a:pPr indent="0" marL="0">
               <a:buNone/>
             </a:pPr>
             <a:r>
@@ -2128,7 +2401,7 @@
           <a:bodyPr wrap="square" lIns="0" tIns="0" rIns="0" bIns="0" rtlCol="0" anchor="ctr"/>
           <a:lstStyle/>
           <a:p>
-            <a:pPr marL="0" indent="0">
+            <a:pPr indent="0" marL="0">
               <a:buNone/>
             </a:pPr>
             <a:r>
@@ -2167,7 +2440,7 @@
           <a:bodyPr wrap="square" lIns="0" tIns="0" rIns="0" bIns="0" rtlCol="0" anchor="ctr"/>
           <a:lstStyle/>
           <a:p>
-            <a:pPr marL="0" indent="0">
+            <a:pPr indent="0" marL="0">
               <a:buNone/>
             </a:pPr>
             <a:r>
@@ -2206,7 +2479,7 @@
           <a:bodyPr wrap="square" lIns="0" tIns="0" rIns="0" bIns="0" rtlCol="0" anchor="ctr"/>
           <a:lstStyle/>
           <a:p>
-            <a:pPr marL="0" indent="0">
+            <a:pPr indent="0" marL="0">
               <a:buNone/>
             </a:pPr>
             <a:r>
@@ -2245,7 +2518,7 @@
           <a:bodyPr wrap="square" lIns="0" tIns="0" rIns="0" bIns="0" rtlCol="0" anchor="ctr"/>
           <a:lstStyle/>
           <a:p>
-            <a:pPr marL="0" indent="0">
+            <a:pPr indent="0" marL="0">
               <a:buNone/>
             </a:pPr>
             <a:r>
@@ -2284,7 +2557,7 @@
           <a:bodyPr wrap="square" lIns="0" tIns="0" rIns="0" bIns="0" rtlCol="0" anchor="ctr"/>
           <a:lstStyle/>
           <a:p>
-            <a:pPr marL="0" indent="0">
+            <a:pPr indent="0" marL="0">
               <a:buNone/>
             </a:pPr>
             <a:r>
@@ -2323,7 +2596,7 @@
           <a:bodyPr wrap="square" lIns="0" tIns="0" rIns="0" bIns="0" rtlCol="0" anchor="ctr"/>
           <a:lstStyle/>
           <a:p>
-            <a:pPr marL="0" indent="0">
+            <a:pPr indent="0" marL="0">
               <a:buNone/>
             </a:pPr>
             <a:r>
@@ -2362,7 +2635,7 @@
           <a:bodyPr wrap="square" lIns="0" tIns="0" rIns="0" bIns="0" rtlCol="0" anchor="ctr"/>
           <a:lstStyle/>
           <a:p>
-            <a:pPr marL="0" indent="0">
+            <a:pPr indent="0" marL="0">
               <a:buNone/>
             </a:pPr>
             <a:r>
@@ -2424,13 +2697,6 @@
           </a:solidFill>
           <a:ln/>
         </p:spPr>
-        <p:txBody>
-          <a:bodyPr/>
-          <a:lstStyle/>
-          <a:p>
-            <a:endParaRPr lang="en-US"/>
-          </a:p>
-        </p:txBody>
       </p:sp>
       <p:sp>
         <p:nvSpPr>
@@ -2451,13 +2717,6 @@
           </a:solidFill>
           <a:ln/>
         </p:spPr>
-        <p:txBody>
-          <a:bodyPr/>
-          <a:lstStyle/>
-          <a:p>
-            <a:endParaRPr lang="en-US"/>
-          </a:p>
-        </p:txBody>
       </p:sp>
       <p:sp>
         <p:nvSpPr>
@@ -2480,7 +2739,7 @@
           <a:bodyPr wrap="square" lIns="0" tIns="0" rIns="0" bIns="0" rtlCol="0" anchor="ctr"/>
           <a:lstStyle/>
           <a:p>
-            <a:pPr marL="0" indent="0">
+            <a:pPr indent="0" marL="0">
               <a:buNone/>
             </a:pPr>
             <a:r>
@@ -2519,7 +2778,7 @@
           <a:bodyPr wrap="square" lIns="0" tIns="0" rIns="0" bIns="0" rtlCol="0" anchor="t"/>
           <a:lstStyle/>
           <a:p>
-            <a:pPr marL="0" indent="0">
+            <a:pPr indent="0" marL="0">
               <a:buNone/>
             </a:pPr>
             <a:r>
@@ -2531,7 +2790,7 @@
                 <a:ea typeface="Arial" pitchFamily="34" charset="-122"/>
                 <a:cs typeface="Arial" pitchFamily="34" charset="-120"/>
               </a:rPr>
-              <a:t>RELAY uses a synthetic terminal twin — no PSA dataset or LLM API was provided</a:t>
+              <a:t>We built a synthetic terminal twin — PSA did not provide data or LLM access</a:t>
             </a:r>
             <a:endParaRPr lang="en-US" sz="1800" dirty="0"/>
           </a:p>
@@ -2556,13 +2815,6 @@
           </a:solidFill>
           <a:ln/>
         </p:spPr>
-        <p:txBody>
-          <a:bodyPr/>
-          <a:lstStyle/>
-          <a:p>
-            <a:endParaRPr lang="en-US"/>
-          </a:p>
-        </p:txBody>
       </p:sp>
       <p:sp>
         <p:nvSpPr>
@@ -2585,7 +2837,7 @@
           <a:bodyPr wrap="square" lIns="0" tIns="0" rIns="0" bIns="0" rtlCol="0" anchor="ctr"/>
           <a:lstStyle/>
           <a:p>
-            <a:pPr marL="0" indent="0">
+            <a:pPr indent="0" marL="0">
               <a:buNone/>
             </a:pPr>
             <a:r>
@@ -2624,7 +2876,7 @@
           <a:bodyPr wrap="square" lIns="0" tIns="0" rIns="0" bIns="0" rtlCol="0" anchor="ctr"/>
           <a:lstStyle/>
           <a:p>
-            <a:pPr marL="0" indent="0">
+            <a:pPr indent="0" marL="0">
               <a:buNone/>
             </a:pPr>
             <a:r>
@@ -2661,13 +2913,6 @@
           </a:solidFill>
           <a:ln/>
         </p:spPr>
-        <p:txBody>
-          <a:bodyPr/>
-          <a:lstStyle/>
-          <a:p>
-            <a:endParaRPr lang="en-US"/>
-          </a:p>
-        </p:txBody>
       </p:sp>
       <p:sp>
         <p:nvSpPr>
@@ -2690,7 +2935,7 @@
           <a:bodyPr wrap="square" lIns="0" tIns="0" rIns="0" bIns="0" rtlCol="0" anchor="ctr"/>
           <a:lstStyle/>
           <a:p>
-            <a:pPr marL="0" indent="0">
+            <a:pPr indent="0" marL="0">
               <a:buNone/>
             </a:pPr>
             <a:r>
@@ -2729,7 +2974,7 @@
           <a:bodyPr wrap="square" lIns="0" tIns="0" rIns="0" bIns="0" rtlCol="0" anchor="ctr"/>
           <a:lstStyle/>
           <a:p>
-            <a:pPr marL="0" indent="0">
+            <a:pPr indent="0" marL="0">
               <a:buNone/>
             </a:pPr>
             <a:r>
@@ -2766,13 +3011,6 @@
           </a:solidFill>
           <a:ln/>
         </p:spPr>
-        <p:txBody>
-          <a:bodyPr/>
-          <a:lstStyle/>
-          <a:p>
-            <a:endParaRPr lang="en-US"/>
-          </a:p>
-        </p:txBody>
       </p:sp>
       <p:sp>
         <p:nvSpPr>
@@ -2795,7 +3033,7 @@
           <a:bodyPr wrap="square" lIns="0" tIns="0" rIns="0" bIns="0" rtlCol="0" anchor="ctr"/>
           <a:lstStyle/>
           <a:p>
-            <a:pPr marL="0" indent="0">
+            <a:pPr indent="0" marL="0">
               <a:buNone/>
             </a:pPr>
             <a:r>
@@ -2834,7 +3072,7 @@
           <a:bodyPr wrap="square" lIns="0" tIns="0" rIns="0" bIns="0" rtlCol="0" anchor="ctr"/>
           <a:lstStyle/>
           <a:p>
-            <a:pPr marL="0" indent="0">
+            <a:pPr indent="0" marL="0">
               <a:buNone/>
             </a:pPr>
             <a:r>
@@ -2871,13 +3109,6 @@
           </a:solidFill>
           <a:ln/>
         </p:spPr>
-        <p:txBody>
-          <a:bodyPr/>
-          <a:lstStyle/>
-          <a:p>
-            <a:endParaRPr lang="en-US"/>
-          </a:p>
-        </p:txBody>
       </p:sp>
       <p:sp>
         <p:nvSpPr>
@@ -2900,7 +3131,7 @@
           <a:bodyPr wrap="square" lIns="0" tIns="0" rIns="0" bIns="0" rtlCol="0" anchor="ctr"/>
           <a:lstStyle/>
           <a:p>
-            <a:pPr marL="0" indent="0">
+            <a:pPr indent="0" marL="0">
               <a:buNone/>
             </a:pPr>
             <a:r>
@@ -2939,7 +3170,7 @@
           <a:bodyPr wrap="square" lIns="0" tIns="0" rIns="0" bIns="0" rtlCol="0" anchor="ctr"/>
           <a:lstStyle/>
           <a:p>
-            <a:pPr marL="0" indent="0">
+            <a:pPr indent="0" marL="0">
               <a:buNone/>
             </a:pPr>
             <a:r>
@@ -2978,7 +3209,7 @@
           <a:bodyPr wrap="square" lIns="0" tIns="0" rIns="0" bIns="0" rtlCol="0" anchor="ctr"/>
           <a:lstStyle/>
           <a:p>
-            <a:pPr marL="0" indent="0">
+            <a:pPr indent="0" marL="0">
               <a:buNone/>
             </a:pPr>
             <a:r>
@@ -3017,7 +3248,7 @@
           <a:bodyPr wrap="square" lIns="0" tIns="0" rIns="0" bIns="0" rtlCol="0" anchor="ctr"/>
           <a:lstStyle/>
           <a:p>
-            <a:pPr marL="0" indent="0" algn="r">
+            <a:pPr algn="r" indent="0" marL="0">
               <a:buNone/>
             </a:pPr>
             <a:r>
@@ -3079,13 +3310,6 @@
           </a:solidFill>
           <a:ln/>
         </p:spPr>
-        <p:txBody>
-          <a:bodyPr/>
-          <a:lstStyle/>
-          <a:p>
-            <a:endParaRPr lang="en-US"/>
-          </a:p>
-        </p:txBody>
       </p:sp>
       <p:sp>
         <p:nvSpPr>
@@ -3106,13 +3330,6 @@
           </a:solidFill>
           <a:ln/>
         </p:spPr>
-        <p:txBody>
-          <a:bodyPr/>
-          <a:lstStyle/>
-          <a:p>
-            <a:endParaRPr lang="en-US"/>
-          </a:p>
-        </p:txBody>
       </p:sp>
       <p:sp>
         <p:nvSpPr>
@@ -3135,7 +3352,7 @@
           <a:bodyPr wrap="square" lIns="0" tIns="0" rIns="0" bIns="0" rtlCol="0" anchor="ctr"/>
           <a:lstStyle/>
           <a:p>
-            <a:pPr marL="0" indent="0">
+            <a:pPr indent="0" marL="0">
               <a:buNone/>
             </a:pPr>
             <a:r>
@@ -3174,7 +3391,7 @@
           <a:bodyPr wrap="square" lIns="0" tIns="0" rIns="0" bIns="0" rtlCol="0" anchor="t"/>
           <a:lstStyle/>
           <a:p>
-            <a:pPr marL="0" indent="0">
+            <a:pPr indent="0" marL="0">
               <a:buNone/>
             </a:pPr>
             <a:r>
@@ -3186,7 +3403,7 @@
                 <a:ea typeface="Arial" pitchFamily="34" charset="-122"/>
                 <a:cs typeface="Arial" pitchFamily="34" charset="-120"/>
               </a:rPr>
-              <a:t>Implementation is deliberately lean — stdlib brain, React console, zero paid API keys</a:t>
+              <a:t>Stack: Python stdlib backend, React console, no paid API keys to run the demo</a:t>
             </a:r>
             <a:endParaRPr lang="en-US" sz="1800" dirty="0"/>
           </a:p>
@@ -3211,13 +3428,6 @@
           </a:solidFill>
           <a:ln/>
         </p:spPr>
-        <p:txBody>
-          <a:bodyPr/>
-          <a:lstStyle/>
-          <a:p>
-            <a:endParaRPr lang="en-US"/>
-          </a:p>
-        </p:txBody>
       </p:sp>
       <p:sp>
         <p:nvSpPr>
@@ -3240,7 +3450,7 @@
           <a:bodyPr wrap="square" lIns="0" tIns="0" rIns="0" bIns="0" rtlCol="0" anchor="ctr"/>
           <a:lstStyle/>
           <a:p>
-            <a:pPr marL="0" indent="0">
+            <a:pPr indent="0" marL="0">
               <a:buNone/>
             </a:pPr>
             <a:r>
@@ -3277,13 +3487,6 @@
           </a:solidFill>
           <a:ln/>
         </p:spPr>
-        <p:txBody>
-          <a:bodyPr/>
-          <a:lstStyle/>
-          <a:p>
-            <a:endParaRPr lang="en-US"/>
-          </a:p>
-        </p:txBody>
       </p:sp>
       <p:sp>
         <p:nvSpPr>
@@ -3306,7 +3509,7 @@
           <a:bodyPr wrap="square" lIns="0" tIns="0" rIns="0" bIns="0" rtlCol="0" anchor="ctr"/>
           <a:lstStyle/>
           <a:p>
-            <a:pPr marL="0" indent="0">
+            <a:pPr indent="0" marL="0">
               <a:buNone/>
             </a:pPr>
             <a:r>
@@ -3343,13 +3546,6 @@
           </a:solidFill>
           <a:ln/>
         </p:spPr>
-        <p:txBody>
-          <a:bodyPr/>
-          <a:lstStyle/>
-          <a:p>
-            <a:endParaRPr lang="en-US"/>
-          </a:p>
-        </p:txBody>
       </p:sp>
       <p:sp>
         <p:nvSpPr>
@@ -3372,7 +3568,7 @@
           <a:bodyPr wrap="square" lIns="0" tIns="0" rIns="0" bIns="0" rtlCol="0" anchor="ctr"/>
           <a:lstStyle/>
           <a:p>
-            <a:pPr marL="0" indent="0">
+            <a:pPr indent="0" marL="0">
               <a:buNone/>
             </a:pPr>
             <a:r>
@@ -3409,13 +3605,6 @@
           </a:solidFill>
           <a:ln/>
         </p:spPr>
-        <p:txBody>
-          <a:bodyPr/>
-          <a:lstStyle/>
-          <a:p>
-            <a:endParaRPr lang="en-US"/>
-          </a:p>
-        </p:txBody>
       </p:sp>
       <p:sp>
         <p:nvSpPr>
@@ -3438,7 +3627,7 @@
           <a:bodyPr wrap="square" lIns="0" tIns="0" rIns="0" bIns="0" rtlCol="0" anchor="ctr"/>
           <a:lstStyle/>
           <a:p>
-            <a:pPr marL="0" indent="0">
+            <a:pPr indent="0" marL="0">
               <a:buNone/>
             </a:pPr>
             <a:r>
@@ -3475,13 +3664,6 @@
           </a:solidFill>
           <a:ln/>
         </p:spPr>
-        <p:txBody>
-          <a:bodyPr/>
-          <a:lstStyle/>
-          <a:p>
-            <a:endParaRPr lang="en-US"/>
-          </a:p>
-        </p:txBody>
       </p:sp>
       <p:sp>
         <p:nvSpPr>
@@ -3504,7 +3686,7 @@
           <a:bodyPr wrap="square" lIns="0" tIns="0" rIns="0" bIns="0" rtlCol="0" anchor="ctr"/>
           <a:lstStyle/>
           <a:p>
-            <a:pPr marL="0" indent="0">
+            <a:pPr indent="0" marL="0">
               <a:buNone/>
             </a:pPr>
             <a:r>
@@ -3541,13 +3723,6 @@
           </a:solidFill>
           <a:ln/>
         </p:spPr>
-        <p:txBody>
-          <a:bodyPr/>
-          <a:lstStyle/>
-          <a:p>
-            <a:endParaRPr lang="en-US"/>
-          </a:p>
-        </p:txBody>
       </p:sp>
       <p:sp>
         <p:nvSpPr>
@@ -3570,7 +3745,7 @@
           <a:bodyPr wrap="square" lIns="0" tIns="0" rIns="0" bIns="0" rtlCol="0" anchor="ctr"/>
           <a:lstStyle/>
           <a:p>
-            <a:pPr marL="0" indent="0">
+            <a:pPr indent="0" marL="0">
               <a:buNone/>
             </a:pPr>
             <a:r>
@@ -3607,13 +3782,6 @@
           </a:solidFill>
           <a:ln/>
         </p:spPr>
-        <p:txBody>
-          <a:bodyPr/>
-          <a:lstStyle/>
-          <a:p>
-            <a:endParaRPr lang="en-US"/>
-          </a:p>
-        </p:txBody>
       </p:sp>
       <p:sp>
         <p:nvSpPr>
@@ -3636,7 +3804,7 @@
           <a:bodyPr wrap="square" lIns="0" tIns="0" rIns="0" bIns="0" rtlCol="0" anchor="ctr"/>
           <a:lstStyle/>
           <a:p>
-            <a:pPr marL="0" indent="0">
+            <a:pPr indent="0" marL="0">
               <a:buNone/>
             </a:pPr>
             <a:r>
@@ -3673,13 +3841,6 @@
           </a:solidFill>
           <a:ln/>
         </p:spPr>
-        <p:txBody>
-          <a:bodyPr/>
-          <a:lstStyle/>
-          <a:p>
-            <a:endParaRPr lang="en-US"/>
-          </a:p>
-        </p:txBody>
       </p:sp>
       <p:sp>
         <p:nvSpPr>
@@ -3702,7 +3863,7 @@
           <a:bodyPr wrap="square" lIns="0" tIns="0" rIns="0" bIns="0" rtlCol="0" anchor="ctr"/>
           <a:lstStyle/>
           <a:p>
-            <a:pPr marL="0" indent="0">
+            <a:pPr indent="0" marL="0">
               <a:buNone/>
             </a:pPr>
             <a:r>
@@ -3739,13 +3900,6 @@
           </a:solidFill>
           <a:ln/>
         </p:spPr>
-        <p:txBody>
-          <a:bodyPr/>
-          <a:lstStyle/>
-          <a:p>
-            <a:endParaRPr lang="en-US"/>
-          </a:p>
-        </p:txBody>
       </p:sp>
       <p:sp>
         <p:nvSpPr>
@@ -3768,7 +3922,7 @@
           <a:bodyPr wrap="square" lIns="0" tIns="0" rIns="0" bIns="0" rtlCol="0" anchor="ctr"/>
           <a:lstStyle/>
           <a:p>
-            <a:pPr marL="0" indent="0">
+            <a:pPr indent="0" marL="0">
               <a:buNone/>
             </a:pPr>
             <a:r>
@@ -3805,13 +3959,6 @@
           </a:solidFill>
           <a:ln/>
         </p:spPr>
-        <p:txBody>
-          <a:bodyPr/>
-          <a:lstStyle/>
-          <a:p>
-            <a:endParaRPr lang="en-US"/>
-          </a:p>
-        </p:txBody>
       </p:sp>
       <p:sp>
         <p:nvSpPr>
@@ -3834,7 +3981,7 @@
           <a:bodyPr wrap="square" lIns="0" tIns="0" rIns="0" bIns="0" rtlCol="0" anchor="ctr"/>
           <a:lstStyle/>
           <a:p>
-            <a:pPr marL="0" indent="0">
+            <a:pPr indent="0" marL="0">
               <a:buNone/>
             </a:pPr>
             <a:r>
@@ -3871,13 +4018,6 @@
           </a:solidFill>
           <a:ln/>
         </p:spPr>
-        <p:txBody>
-          <a:bodyPr/>
-          <a:lstStyle/>
-          <a:p>
-            <a:endParaRPr lang="en-US"/>
-          </a:p>
-        </p:txBody>
       </p:sp>
       <p:sp>
         <p:nvSpPr>
@@ -3900,7 +4040,7 @@
           <a:bodyPr wrap="square" lIns="0" tIns="0" rIns="0" bIns="0" rtlCol="0" anchor="ctr"/>
           <a:lstStyle/>
           <a:p>
-            <a:pPr marL="0" indent="0">
+            <a:pPr indent="0" marL="0">
               <a:buNone/>
             </a:pPr>
             <a:r>
@@ -3937,13 +4077,6 @@
           </a:solidFill>
           <a:ln/>
         </p:spPr>
-        <p:txBody>
-          <a:bodyPr/>
-          <a:lstStyle/>
-          <a:p>
-            <a:endParaRPr lang="en-US"/>
-          </a:p>
-        </p:txBody>
       </p:sp>
       <p:sp>
         <p:nvSpPr>
@@ -3966,7 +4099,7 @@
           <a:bodyPr wrap="square" lIns="0" tIns="0" rIns="0" bIns="0" rtlCol="0" anchor="ctr"/>
           <a:lstStyle/>
           <a:p>
-            <a:pPr marL="0" indent="0">
+            <a:pPr indent="0" marL="0">
               <a:buNone/>
             </a:pPr>
             <a:r>
@@ -4003,13 +4136,6 @@
           </a:solidFill>
           <a:ln/>
         </p:spPr>
-        <p:txBody>
-          <a:bodyPr/>
-          <a:lstStyle/>
-          <a:p>
-            <a:endParaRPr lang="en-US"/>
-          </a:p>
-        </p:txBody>
       </p:sp>
       <p:sp>
         <p:nvSpPr>
@@ -4032,7 +4158,7 @@
           <a:bodyPr wrap="square" lIns="0" tIns="0" rIns="0" bIns="0" rtlCol="0" anchor="ctr"/>
           <a:lstStyle/>
           <a:p>
-            <a:pPr marL="0" indent="0">
+            <a:pPr indent="0" marL="0">
               <a:buNone/>
             </a:pPr>
             <a:r>
@@ -4069,13 +4195,6 @@
           </a:solidFill>
           <a:ln/>
         </p:spPr>
-        <p:txBody>
-          <a:bodyPr/>
-          <a:lstStyle/>
-          <a:p>
-            <a:endParaRPr lang="en-US"/>
-          </a:p>
-        </p:txBody>
       </p:sp>
       <p:sp>
         <p:nvSpPr>
@@ -4098,7 +4217,7 @@
           <a:bodyPr wrap="square" lIns="0" tIns="0" rIns="0" bIns="0" rtlCol="0" anchor="ctr"/>
           <a:lstStyle/>
           <a:p>
-            <a:pPr marL="0" indent="0">
+            <a:pPr indent="0" marL="0">
               <a:buNone/>
             </a:pPr>
             <a:r>
@@ -4135,13 +4254,6 @@
           </a:solidFill>
           <a:ln/>
         </p:spPr>
-        <p:txBody>
-          <a:bodyPr/>
-          <a:lstStyle/>
-          <a:p>
-            <a:endParaRPr lang="en-US"/>
-          </a:p>
-        </p:txBody>
       </p:sp>
       <p:sp>
         <p:nvSpPr>
@@ -4164,7 +4276,7 @@
           <a:bodyPr wrap="square" lIns="0" tIns="0" rIns="0" bIns="0" rtlCol="0" anchor="ctr"/>
           <a:lstStyle/>
           <a:p>
-            <a:pPr marL="0" indent="0">
+            <a:pPr indent="0" marL="0">
               <a:buNone/>
             </a:pPr>
             <a:r>
@@ -4201,13 +4313,6 @@
           </a:solidFill>
           <a:ln/>
         </p:spPr>
-        <p:txBody>
-          <a:bodyPr/>
-          <a:lstStyle/>
-          <a:p>
-            <a:endParaRPr lang="en-US"/>
-          </a:p>
-        </p:txBody>
       </p:sp>
       <p:sp>
         <p:nvSpPr>
@@ -4230,7 +4335,7 @@
           <a:bodyPr wrap="square" lIns="0" tIns="0" rIns="0" bIns="0" rtlCol="0" anchor="ctr"/>
           <a:lstStyle/>
           <a:p>
-            <a:pPr marL="0" indent="0">
+            <a:pPr indent="0" marL="0">
               <a:buNone/>
             </a:pPr>
             <a:r>
@@ -4267,13 +4372,6 @@
           </a:solidFill>
           <a:ln/>
         </p:spPr>
-        <p:txBody>
-          <a:bodyPr/>
-          <a:lstStyle/>
-          <a:p>
-            <a:endParaRPr lang="en-US"/>
-          </a:p>
-        </p:txBody>
       </p:sp>
       <p:sp>
         <p:nvSpPr>
@@ -4296,7 +4394,7 @@
           <a:bodyPr wrap="square" lIns="0" tIns="0" rIns="0" bIns="0" rtlCol="0" anchor="ctr"/>
           <a:lstStyle/>
           <a:p>
-            <a:pPr marL="0" indent="0">
+            <a:pPr indent="0" marL="0">
               <a:buNone/>
             </a:pPr>
             <a:r>
@@ -4333,13 +4431,6 @@
           </a:solidFill>
           <a:ln/>
         </p:spPr>
-        <p:txBody>
-          <a:bodyPr/>
-          <a:lstStyle/>
-          <a:p>
-            <a:endParaRPr lang="en-US"/>
-          </a:p>
-        </p:txBody>
       </p:sp>
       <p:sp>
         <p:nvSpPr>
@@ -4362,7 +4453,7 @@
           <a:bodyPr wrap="square" lIns="0" tIns="0" rIns="0" bIns="0" rtlCol="0" anchor="ctr"/>
           <a:lstStyle/>
           <a:p>
-            <a:pPr marL="0" indent="0">
+            <a:pPr indent="0" marL="0">
               <a:buNone/>
             </a:pPr>
             <a:r>
@@ -4401,7 +4492,7 @@
           <a:bodyPr wrap="square" lIns="0" tIns="0" rIns="0" bIns="0" rtlCol="0" anchor="ctr"/>
           <a:lstStyle/>
           <a:p>
-            <a:pPr marL="0" indent="0">
+            <a:pPr indent="0" marL="0">
               <a:buNone/>
             </a:pPr>
             <a:r>
@@ -4440,7 +4531,7 @@
           <a:bodyPr wrap="square" lIns="0" tIns="0" rIns="0" bIns="0" rtlCol="0" anchor="ctr"/>
           <a:lstStyle/>
           <a:p>
-            <a:pPr marL="0" indent="0" algn="r">
+            <a:pPr algn="r" indent="0" marL="0">
               <a:buNone/>
             </a:pPr>
             <a:r>
@@ -4502,13 +4593,6 @@
           </a:solidFill>
           <a:ln/>
         </p:spPr>
-        <p:txBody>
-          <a:bodyPr/>
-          <a:lstStyle/>
-          <a:p>
-            <a:endParaRPr lang="en-US"/>
-          </a:p>
-        </p:txBody>
       </p:sp>
       <p:sp>
         <p:nvSpPr>
@@ -4529,13 +4613,6 @@
           </a:solidFill>
           <a:ln/>
         </p:spPr>
-        <p:txBody>
-          <a:bodyPr/>
-          <a:lstStyle/>
-          <a:p>
-            <a:endParaRPr lang="en-US"/>
-          </a:p>
-        </p:txBody>
       </p:sp>
       <p:sp>
         <p:nvSpPr>
@@ -4558,7 +4635,7 @@
           <a:bodyPr wrap="square" lIns="0" tIns="0" rIns="0" bIns="0" rtlCol="0" anchor="ctr"/>
           <a:lstStyle/>
           <a:p>
-            <a:pPr marL="0" indent="0">
+            <a:pPr indent="0" marL="0">
               <a:buNone/>
             </a:pPr>
             <a:r>
@@ -4597,7 +4674,7 @@
           <a:bodyPr wrap="square" lIns="0" tIns="0" rIns="0" bIns="0" rtlCol="0" anchor="t"/>
           <a:lstStyle/>
           <a:p>
-            <a:pPr marL="0" indent="0">
+            <a:pPr indent="0" marL="0">
               <a:buNone/>
             </a:pPr>
             <a:r>
@@ -4609,7 +4686,7 @@
                 <a:ea typeface="Arial" pitchFamily="34" charset="-122"/>
                 <a:cs typeface="Arial" pitchFamily="34" charset="-120"/>
               </a:rPr>
-              <a:t>Each agent owns one job — Critic can dissent; Executor never bypasses approval tokens</a:t>
+              <a:t>One job per agent — Critic can say no; Executor cannot skip approval</a:t>
             </a:r>
             <a:endParaRPr lang="en-US" sz="1800" dirty="0"/>
           </a:p>
@@ -4634,13 +4711,6 @@
           </a:solidFill>
           <a:ln/>
         </p:spPr>
-        <p:txBody>
-          <a:bodyPr/>
-          <a:lstStyle/>
-          <a:p>
-            <a:endParaRPr lang="en-US"/>
-          </a:p>
-        </p:txBody>
       </p:sp>
       <p:sp>
         <p:nvSpPr>
@@ -4663,7 +4733,7 @@
           <a:bodyPr wrap="square" lIns="0" tIns="0" rIns="0" bIns="0" rtlCol="0" anchor="ctr"/>
           <a:lstStyle/>
           <a:p>
-            <a:pPr marL="0" indent="0" algn="ctr">
+            <a:pPr algn="ctr" indent="0" marL="0">
               <a:buNone/>
             </a:pPr>
             <a:r>
@@ -4700,13 +4770,6 @@
           </a:solidFill>
           <a:ln/>
         </p:spPr>
-        <p:txBody>
-          <a:bodyPr/>
-          <a:lstStyle/>
-          <a:p>
-            <a:endParaRPr lang="en-US"/>
-          </a:p>
-        </p:txBody>
       </p:sp>
       <p:sp>
         <p:nvSpPr>
@@ -4729,7 +4792,7 @@
           <a:bodyPr wrap="square" lIns="0" tIns="0" rIns="0" bIns="0" rtlCol="0" anchor="ctr"/>
           <a:lstStyle/>
           <a:p>
-            <a:pPr marL="0" indent="0">
+            <a:pPr indent="0" marL="0">
               <a:buNone/>
             </a:pPr>
             <a:r>
@@ -4766,13 +4829,6 @@
           </a:solidFill>
           <a:ln/>
         </p:spPr>
-        <p:txBody>
-          <a:bodyPr/>
-          <a:lstStyle/>
-          <a:p>
-            <a:endParaRPr lang="en-US"/>
-          </a:p>
-        </p:txBody>
       </p:sp>
       <p:sp>
         <p:nvSpPr>
@@ -4795,7 +4851,7 @@
           <a:bodyPr wrap="square" lIns="0" tIns="0" rIns="0" bIns="0" rtlCol="0" anchor="ctr"/>
           <a:lstStyle/>
           <a:p>
-            <a:pPr marL="0" indent="0" algn="ctr">
+            <a:pPr algn="ctr" indent="0" marL="0">
               <a:buNone/>
             </a:pPr>
             <a:r>
@@ -4832,13 +4888,6 @@
           </a:solidFill>
           <a:ln/>
         </p:spPr>
-        <p:txBody>
-          <a:bodyPr/>
-          <a:lstStyle/>
-          <a:p>
-            <a:endParaRPr lang="en-US"/>
-          </a:p>
-        </p:txBody>
       </p:sp>
       <p:sp>
         <p:nvSpPr>
@@ -4861,7 +4910,7 @@
           <a:bodyPr wrap="square" lIns="0" tIns="0" rIns="0" bIns="0" rtlCol="0" anchor="ctr"/>
           <a:lstStyle/>
           <a:p>
-            <a:pPr marL="0" indent="0">
+            <a:pPr indent="0" marL="0">
               <a:buNone/>
             </a:pPr>
             <a:r>
@@ -4898,13 +4947,6 @@
           </a:solidFill>
           <a:ln/>
         </p:spPr>
-        <p:txBody>
-          <a:bodyPr/>
-          <a:lstStyle/>
-          <a:p>
-            <a:endParaRPr lang="en-US"/>
-          </a:p>
-        </p:txBody>
       </p:sp>
       <p:sp>
         <p:nvSpPr>
@@ -4927,7 +4969,7 @@
           <a:bodyPr wrap="square" lIns="0" tIns="0" rIns="0" bIns="0" rtlCol="0" anchor="ctr"/>
           <a:lstStyle/>
           <a:p>
-            <a:pPr marL="0" indent="0" algn="ctr">
+            <a:pPr algn="ctr" indent="0" marL="0">
               <a:buNone/>
             </a:pPr>
             <a:r>
@@ -4964,13 +5006,6 @@
           </a:solidFill>
           <a:ln/>
         </p:spPr>
-        <p:txBody>
-          <a:bodyPr/>
-          <a:lstStyle/>
-          <a:p>
-            <a:endParaRPr lang="en-US"/>
-          </a:p>
-        </p:txBody>
       </p:sp>
       <p:sp>
         <p:nvSpPr>
@@ -4993,7 +5028,7 @@
           <a:bodyPr wrap="square" lIns="0" tIns="0" rIns="0" bIns="0" rtlCol="0" anchor="ctr"/>
           <a:lstStyle/>
           <a:p>
-            <a:pPr marL="0" indent="0">
+            <a:pPr indent="0" marL="0">
               <a:buNone/>
             </a:pPr>
             <a:r>
@@ -5030,13 +5065,6 @@
           </a:solidFill>
           <a:ln/>
         </p:spPr>
-        <p:txBody>
-          <a:bodyPr/>
-          <a:lstStyle/>
-          <a:p>
-            <a:endParaRPr lang="en-US"/>
-          </a:p>
-        </p:txBody>
       </p:sp>
       <p:sp>
         <p:nvSpPr>
@@ -5059,7 +5087,7 @@
           <a:bodyPr wrap="square" lIns="0" tIns="0" rIns="0" bIns="0" rtlCol="0" anchor="ctr"/>
           <a:lstStyle/>
           <a:p>
-            <a:pPr marL="0" indent="0" algn="ctr">
+            <a:pPr algn="ctr" indent="0" marL="0">
               <a:buNone/>
             </a:pPr>
             <a:r>
@@ -5096,13 +5124,6 @@
           </a:solidFill>
           <a:ln/>
         </p:spPr>
-        <p:txBody>
-          <a:bodyPr/>
-          <a:lstStyle/>
-          <a:p>
-            <a:endParaRPr lang="en-US"/>
-          </a:p>
-        </p:txBody>
       </p:sp>
       <p:sp>
         <p:nvSpPr>
@@ -5125,7 +5146,7 @@
           <a:bodyPr wrap="square" lIns="0" tIns="0" rIns="0" bIns="0" rtlCol="0" anchor="ctr"/>
           <a:lstStyle/>
           <a:p>
-            <a:pPr marL="0" indent="0">
+            <a:pPr indent="0" marL="0">
               <a:buNone/>
             </a:pPr>
             <a:r>
@@ -5162,13 +5183,6 @@
           </a:solidFill>
           <a:ln/>
         </p:spPr>
-        <p:txBody>
-          <a:bodyPr/>
-          <a:lstStyle/>
-          <a:p>
-            <a:endParaRPr lang="en-US"/>
-          </a:p>
-        </p:txBody>
       </p:sp>
       <p:sp>
         <p:nvSpPr>
@@ -5191,7 +5205,7 @@
           <a:bodyPr wrap="square" lIns="0" tIns="0" rIns="0" bIns="0" rtlCol="0" anchor="ctr"/>
           <a:lstStyle/>
           <a:p>
-            <a:pPr marL="0" indent="0" algn="ctr">
+            <a:pPr algn="ctr" indent="0" marL="0">
               <a:buNone/>
             </a:pPr>
             <a:r>
@@ -5228,13 +5242,6 @@
           </a:solidFill>
           <a:ln/>
         </p:spPr>
-        <p:txBody>
-          <a:bodyPr/>
-          <a:lstStyle/>
-          <a:p>
-            <a:endParaRPr lang="en-US"/>
-          </a:p>
-        </p:txBody>
       </p:sp>
       <p:sp>
         <p:nvSpPr>
@@ -5257,7 +5264,7 @@
           <a:bodyPr wrap="square" lIns="0" tIns="0" rIns="0" bIns="0" rtlCol="0" anchor="ctr"/>
           <a:lstStyle/>
           <a:p>
-            <a:pPr marL="0" indent="0">
+            <a:pPr indent="0" marL="0">
               <a:buNone/>
             </a:pPr>
             <a:r>
@@ -5294,13 +5301,6 @@
           </a:solidFill>
           <a:ln/>
         </p:spPr>
-        <p:txBody>
-          <a:bodyPr/>
-          <a:lstStyle/>
-          <a:p>
-            <a:endParaRPr lang="en-US"/>
-          </a:p>
-        </p:txBody>
       </p:sp>
       <p:sp>
         <p:nvSpPr>
@@ -5323,7 +5323,7 @@
           <a:bodyPr wrap="square" lIns="0" tIns="0" rIns="0" bIns="0" rtlCol="0" anchor="ctr"/>
           <a:lstStyle/>
           <a:p>
-            <a:pPr marL="0" indent="0" algn="ctr">
+            <a:pPr algn="ctr" indent="0" marL="0">
               <a:buNone/>
             </a:pPr>
             <a:r>
@@ -5360,13 +5360,6 @@
           </a:solidFill>
           <a:ln/>
         </p:spPr>
-        <p:txBody>
-          <a:bodyPr/>
-          <a:lstStyle/>
-          <a:p>
-            <a:endParaRPr lang="en-US"/>
-          </a:p>
-        </p:txBody>
       </p:sp>
       <p:sp>
         <p:nvSpPr>
@@ -5389,7 +5382,7 @@
           <a:bodyPr wrap="square" lIns="0" tIns="0" rIns="0" bIns="0" rtlCol="0" anchor="ctr"/>
           <a:lstStyle/>
           <a:p>
-            <a:pPr marL="0" indent="0">
+            <a:pPr indent="0" marL="0">
               <a:buNone/>
             </a:pPr>
             <a:r>
@@ -5426,13 +5419,6 @@
           </a:solidFill>
           <a:ln/>
         </p:spPr>
-        <p:txBody>
-          <a:bodyPr/>
-          <a:lstStyle/>
-          <a:p>
-            <a:endParaRPr lang="en-US"/>
-          </a:p>
-        </p:txBody>
       </p:sp>
       <p:sp>
         <p:nvSpPr>
@@ -5455,7 +5441,7 @@
           <a:bodyPr wrap="square" lIns="0" tIns="0" rIns="0" bIns="0" rtlCol="0" anchor="ctr"/>
           <a:lstStyle/>
           <a:p>
-            <a:pPr marL="0" indent="0" algn="ctr">
+            <a:pPr algn="ctr" indent="0" marL="0">
               <a:buNone/>
             </a:pPr>
             <a:r>
@@ -5492,13 +5478,6 @@
           </a:solidFill>
           <a:ln/>
         </p:spPr>
-        <p:txBody>
-          <a:bodyPr/>
-          <a:lstStyle/>
-          <a:p>
-            <a:endParaRPr lang="en-US"/>
-          </a:p>
-        </p:txBody>
       </p:sp>
       <p:sp>
         <p:nvSpPr>
@@ -5521,7 +5500,7 @@
           <a:bodyPr wrap="square" lIns="0" tIns="0" rIns="0" bIns="0" rtlCol="0" anchor="ctr"/>
           <a:lstStyle/>
           <a:p>
-            <a:pPr marL="0" indent="0">
+            <a:pPr indent="0" marL="0">
               <a:buNone/>
             </a:pPr>
             <a:r>
@@ -5560,7 +5539,7 @@
           <a:bodyPr wrap="square" lIns="0" tIns="0" rIns="0" bIns="0" rtlCol="0" anchor="ctr"/>
           <a:lstStyle/>
           <a:p>
-            <a:pPr marL="0" indent="0">
+            <a:pPr indent="0" marL="0">
               <a:buNone/>
             </a:pPr>
             <a:r>
@@ -5599,7 +5578,7 @@
           <a:bodyPr wrap="square" lIns="0" tIns="0" rIns="0" bIns="0" rtlCol="0" anchor="ctr"/>
           <a:lstStyle/>
           <a:p>
-            <a:pPr marL="0" indent="0" algn="r">
+            <a:pPr algn="r" indent="0" marL="0">
               <a:buNone/>
             </a:pPr>
             <a:r>
@@ -5661,13 +5640,6 @@
           </a:solidFill>
           <a:ln/>
         </p:spPr>
-        <p:txBody>
-          <a:bodyPr/>
-          <a:lstStyle/>
-          <a:p>
-            <a:endParaRPr lang="en-US"/>
-          </a:p>
-        </p:txBody>
       </p:sp>
       <p:sp>
         <p:nvSpPr>
@@ -5688,13 +5660,6 @@
           </a:solidFill>
           <a:ln/>
         </p:spPr>
-        <p:txBody>
-          <a:bodyPr/>
-          <a:lstStyle/>
-          <a:p>
-            <a:endParaRPr lang="en-US"/>
-          </a:p>
-        </p:txBody>
       </p:sp>
       <p:sp>
         <p:nvSpPr>
@@ -5717,7 +5682,7 @@
           <a:bodyPr wrap="square" lIns="0" tIns="0" rIns="0" bIns="0" rtlCol="0" anchor="ctr"/>
           <a:lstStyle/>
           <a:p>
-            <a:pPr marL="0" indent="0">
+            <a:pPr indent="0" marL="0">
               <a:buNone/>
             </a:pPr>
             <a:r>
@@ -5756,7 +5721,7 @@
           <a:bodyPr wrap="square" lIns="0" tIns="0" rIns="0" bIns="0" rtlCol="0" anchor="t"/>
           <a:lstStyle/>
           <a:p>
-            <a:pPr marL="0" indent="0">
+            <a:pPr indent="0" marL="0">
               <a:buNone/>
             </a:pPr>
             <a:r>
@@ -5768,7 +5733,7 @@
                 <a:ea typeface="Arial" pitchFamily="34" charset="-122"/>
                 <a:cs typeface="Arial" pitchFamily="34" charset="-120"/>
               </a:rPr>
-              <a:t>Supporting materials for judges — update URLs before upload</a:t>
+              <a:t>Submission files and links — update repo URL before upload</a:t>
             </a:r>
             <a:endParaRPr lang="en-US" sz="1800" dirty="0"/>
           </a:p>
@@ -5793,13 +5758,6 @@
           </a:solidFill>
           <a:ln/>
         </p:spPr>
-        <p:txBody>
-          <a:bodyPr/>
-          <a:lstStyle/>
-          <a:p>
-            <a:endParaRPr lang="en-US"/>
-          </a:p>
-        </p:txBody>
       </p:sp>
       <p:sp>
         <p:nvSpPr>
@@ -5822,7 +5780,7 @@
           <a:bodyPr wrap="square" lIns="0" tIns="0" rIns="0" bIns="0" rtlCol="0" anchor="ctr"/>
           <a:lstStyle/>
           <a:p>
-            <a:pPr marL="0" indent="0">
+            <a:pPr indent="0" marL="0">
               <a:buNone/>
             </a:pPr>
             <a:r>
@@ -5859,18 +5817,11 @@
           </a:solidFill>
           <a:ln/>
         </p:spPr>
-        <p:txBody>
-          <a:bodyPr/>
-          <a:lstStyle/>
-          <a:p>
-            <a:endParaRPr lang="en-US"/>
-          </a:p>
-        </p:txBody>
       </p:sp>
       <p:sp>
         <p:nvSpPr>
           <p:cNvPr id="9" name="Text 7">
-            <a:hlinkClick r:id="rId3" tooltip="https://github.com/"/>
+            <a:hlinkClick r:id="rId1" tooltip="https://github.com/piyaphat38030/psa-relay"/>
           </p:cNvPr>
           <p:cNvSpPr/>
           <p:nvPr/>
@@ -5890,7 +5841,7 @@
           <a:bodyPr wrap="square" lIns="0" tIns="0" rIns="0" bIns="0" rtlCol="0" anchor="ctr"/>
           <a:lstStyle/>
           <a:p>
-            <a:pPr marL="0" indent="0">
+            <a:pPr indent="0" marL="0">
               <a:buNone/>
             </a:pPr>
             <a:r>
@@ -5901,7 +5852,7 @@
                 <a:latin typeface="Calibri" pitchFamily="34" charset="0"/>
                 <a:ea typeface="Calibri" pitchFamily="34" charset="-122"/>
                 <a:cs typeface="Calibri" pitchFamily="34" charset="-120"/>
-                <a:hlinkClick r:id="rId3" tooltip="https://github.com/">
+                <a:hlinkClick r:id="rId1" invalidUrl="" action="" tgtFrame="" tooltip="https://github.com/piyaphat38030/psa-relay" history="1" highlightClick="0" endSnd="0">
                   <a:extLst>
                     <a:ext uri="{A12FA001-AC4F-418D-AE19-62706E023703}">
                       <ahyp:hlinkClr xmlns:ahyp="http://schemas.microsoft.com/office/drawing/2018/hyperlinkcolor" val="tx"/>
@@ -5909,7 +5860,7 @@
                   </a:extLst>
                 </a:hlinkClick>
               </a:rPr>
-              <a:t>GitHub / Cursor repo — paste public URL before submit</a:t>
+              <a:t>https://github.com/piyaphat38030/psa-relay</a:t>
             </a:r>
             <a:endParaRPr lang="en-US" sz="1200" dirty="0"/>
           </a:p>
@@ -5934,13 +5885,6 @@
           </a:solidFill>
           <a:ln/>
         </p:spPr>
-        <p:txBody>
-          <a:bodyPr/>
-          <a:lstStyle/>
-          <a:p>
-            <a:endParaRPr lang="en-US"/>
-          </a:p>
-        </p:txBody>
       </p:sp>
       <p:sp>
         <p:nvSpPr>
@@ -5963,7 +5907,7 @@
           <a:bodyPr wrap="square" lIns="0" tIns="0" rIns="0" bIns="0" rtlCol="0" anchor="ctr"/>
           <a:lstStyle/>
           <a:p>
-            <a:pPr marL="0" indent="0">
+            <a:pPr indent="0" marL="0">
               <a:buNone/>
             </a:pPr>
             <a:r>
@@ -6000,13 +5944,6 @@
           </a:solidFill>
           <a:ln/>
         </p:spPr>
-        <p:txBody>
-          <a:bodyPr/>
-          <a:lstStyle/>
-          <a:p>
-            <a:endParaRPr lang="en-US"/>
-          </a:p>
-        </p:txBody>
       </p:sp>
       <p:sp>
         <p:nvSpPr>
@@ -6029,6 +5966,9 @@
           <a:bodyPr wrap="square" lIns="0" tIns="0" rIns="0" bIns="0" rtlCol="0" anchor="ctr"/>
           <a:lstStyle/>
           <a:p>
+            <a:pPr indent="0" marL="0">
+              <a:buNone/>
+            </a:pPr>
             <a:r>
               <a:rPr lang="en-US" sz="1200" dirty="0">
                 <a:solidFill>
@@ -6038,10 +5978,117 @@
                 <a:ea typeface="Calibri" pitchFamily="34" charset="-122"/>
                 <a:cs typeface="Calibri" pitchFamily="34" charset="-120"/>
               </a:rPr>
-              <a:t>https://</a:t>
-            </a:r>
-            <a:r>
-              <a:rPr lang="en-US" sz="1200" dirty="0" err="1">
+              <a:t>ARCHITECTURE.pdf — upload with submission (flow, decisions, impact, security)</a:t>
+            </a:r>
+            <a:endParaRPr lang="en-US" sz="1200" dirty="0"/>
+          </a:p>
+        </p:txBody>
+      </p:sp>
+      <p:sp>
+        <p:nvSpPr>
+          <p:cNvPr id="14" name="Shape 12"/>
+          <p:cNvSpPr/>
+          <p:nvPr/>
+        </p:nvSpPr>
+        <p:spPr>
+          <a:xfrm>
+            <a:off x="457200" y="2377440"/>
+            <a:ext cx="2011680" cy="502920"/>
+          </a:xfrm>
+          <a:prstGeom prst="rect">
+            <a:avLst/>
+          </a:prstGeom>
+          <a:solidFill>
+            <a:srgbClr val="051C2C"/>
+          </a:solidFill>
+          <a:ln/>
+        </p:spPr>
+      </p:sp>
+      <p:sp>
+        <p:nvSpPr>
+          <p:cNvPr id="15" name="Text 13"/>
+          <p:cNvSpPr/>
+          <p:nvPr/>
+        </p:nvSpPr>
+        <p:spPr>
+          <a:xfrm>
+            <a:off x="548640" y="2505456"/>
+            <a:ext cx="1828800" cy="274320"/>
+          </a:xfrm>
+          <a:prstGeom prst="rect">
+            <a:avLst/>
+          </a:prstGeom>
+          <a:noFill/>
+          <a:ln/>
+        </p:spPr>
+        <p:txBody>
+          <a:bodyPr wrap="square" lIns="0" tIns="0" rIns="0" bIns="0" rtlCol="0" anchor="ctr"/>
+          <a:lstStyle/>
+          <a:p>
+            <a:pPr indent="0" marL="0">
+              <a:buNone/>
+            </a:pPr>
+            <a:r>
+              <a:rPr lang="en-US" sz="1200" b="1" dirty="0">
+                <a:solidFill>
+                  <a:srgbClr val="FFFFFF"/>
+                </a:solidFill>
+                <a:latin typeface="Arial" pitchFamily="34" charset="0"/>
+                <a:ea typeface="Arial" pitchFamily="34" charset="-122"/>
+                <a:cs typeface="Arial" pitchFamily="34" charset="-120"/>
+              </a:rPr>
+              <a:t>Local demo</a:t>
+            </a:r>
+            <a:endParaRPr lang="en-US" sz="1200" dirty="0"/>
+          </a:p>
+        </p:txBody>
+      </p:sp>
+      <p:sp>
+        <p:nvSpPr>
+          <p:cNvPr id="16" name="Shape 14"/>
+          <p:cNvSpPr/>
+          <p:nvPr/>
+        </p:nvSpPr>
+        <p:spPr>
+          <a:xfrm>
+            <a:off x="2468880" y="2377440"/>
+            <a:ext cx="6217920" cy="502920"/>
+          </a:xfrm>
+          <a:prstGeom prst="rect">
+            <a:avLst/>
+          </a:prstGeom>
+          <a:solidFill>
+            <a:srgbClr val="F2F2F2"/>
+          </a:solidFill>
+          <a:ln/>
+        </p:spPr>
+      </p:sp>
+      <p:sp>
+        <p:nvSpPr>
+          <p:cNvPr id="17" name="Text 15"/>
+          <p:cNvSpPr/>
+          <p:nvPr/>
+        </p:nvSpPr>
+        <p:spPr>
+          <a:xfrm>
+            <a:off x="2651760" y="2505456"/>
+            <a:ext cx="5852160" cy="274320"/>
+          </a:xfrm>
+          <a:prstGeom prst="rect">
+            <a:avLst/>
+          </a:prstGeom>
+          <a:noFill/>
+          <a:ln/>
+        </p:spPr>
+        <p:txBody>
+          <a:bodyPr wrap="square" lIns="0" tIns="0" rIns="0" bIns="0" rtlCol="0" anchor="ctr"/>
+          <a:lstStyle/>
+          <a:p>
+            <a:pPr indent="0" marL="0">
+              <a:buNone/>
+            </a:pPr>
+            <a:r>
+              <a:rPr lang="en-US" sz="1200" dirty="0">
                 <a:solidFill>
                   <a:srgbClr val="333333"/>
                 </a:solidFill>
@@ -6049,8 +6096,115 @@
                 <a:ea typeface="Calibri" pitchFamily="34" charset="-122"/>
                 <a:cs typeface="Calibri" pitchFamily="34" charset="-120"/>
               </a:rPr>
-              <a:t>drive.google.com</a:t>
-            </a:r>
+              <a:t>API :8000 · Console :5173 — see relay/README.md quick start</a:t>
+            </a:r>
+            <a:endParaRPr lang="en-US" sz="1200" dirty="0"/>
+          </a:p>
+        </p:txBody>
+      </p:sp>
+      <p:sp>
+        <p:nvSpPr>
+          <p:cNvPr id="18" name="Shape 16"/>
+          <p:cNvSpPr/>
+          <p:nvPr/>
+        </p:nvSpPr>
+        <p:spPr>
+          <a:xfrm>
+            <a:off x="457200" y="3017520"/>
+            <a:ext cx="2011680" cy="502920"/>
+          </a:xfrm>
+          <a:prstGeom prst="rect">
+            <a:avLst/>
+          </a:prstGeom>
+          <a:solidFill>
+            <a:srgbClr val="051C2C"/>
+          </a:solidFill>
+          <a:ln/>
+        </p:spPr>
+      </p:sp>
+      <p:sp>
+        <p:nvSpPr>
+          <p:cNvPr id="19" name="Text 17"/>
+          <p:cNvSpPr/>
+          <p:nvPr/>
+        </p:nvSpPr>
+        <p:spPr>
+          <a:xfrm>
+            <a:off x="548640" y="3145536"/>
+            <a:ext cx="1828800" cy="274320"/>
+          </a:xfrm>
+          <a:prstGeom prst="rect">
+            <a:avLst/>
+          </a:prstGeom>
+          <a:noFill/>
+          <a:ln/>
+        </p:spPr>
+        <p:txBody>
+          <a:bodyPr wrap="square" lIns="0" tIns="0" rIns="0" bIns="0" rtlCol="0" anchor="ctr"/>
+          <a:lstStyle/>
+          <a:p>
+            <a:pPr indent="0" marL="0">
+              <a:buNone/>
+            </a:pPr>
+            <a:r>
+              <a:rPr lang="en-US" sz="1200" b="1" dirty="0">
+                <a:solidFill>
+                  <a:srgbClr val="FFFFFF"/>
+                </a:solidFill>
+                <a:latin typeface="Arial" pitchFamily="34" charset="0"/>
+                <a:ea typeface="Arial" pitchFamily="34" charset="-122"/>
+                <a:cs typeface="Arial" pitchFamily="34" charset="-120"/>
+              </a:rPr>
+              <a:t>Submit by</a:t>
+            </a:r>
+            <a:endParaRPr lang="en-US" sz="1200" dirty="0"/>
+          </a:p>
+        </p:txBody>
+      </p:sp>
+      <p:sp>
+        <p:nvSpPr>
+          <p:cNvPr id="20" name="Shape 18"/>
+          <p:cNvSpPr/>
+          <p:nvPr/>
+        </p:nvSpPr>
+        <p:spPr>
+          <a:xfrm>
+            <a:off x="2468880" y="3017520"/>
+            <a:ext cx="6217920" cy="502920"/>
+          </a:xfrm>
+          <a:prstGeom prst="rect">
+            <a:avLst/>
+          </a:prstGeom>
+          <a:solidFill>
+            <a:srgbClr val="F2F2F2"/>
+          </a:solidFill>
+          <a:ln/>
+        </p:spPr>
+      </p:sp>
+      <p:sp>
+        <p:nvSpPr>
+          <p:cNvPr id="21" name="Text 19"/>
+          <p:cNvSpPr/>
+          <p:nvPr/>
+        </p:nvSpPr>
+        <p:spPr>
+          <a:xfrm>
+            <a:off x="2651760" y="3145536"/>
+            <a:ext cx="5852160" cy="274320"/>
+          </a:xfrm>
+          <a:prstGeom prst="rect">
+            <a:avLst/>
+          </a:prstGeom>
+          <a:noFill/>
+          <a:ln/>
+        </p:spPr>
+        <p:txBody>
+          <a:bodyPr wrap="square" lIns="0" tIns="0" rIns="0" bIns="0" rtlCol="0" anchor="ctr"/>
+          <a:lstStyle/>
+          <a:p>
+            <a:pPr indent="0" marL="0">
+              <a:buNone/>
+            </a:pPr>
             <a:r>
               <a:rPr lang="en-US" sz="1200" dirty="0">
                 <a:solidFill>
@@ -6060,277 +6214,84 @@
                 <a:ea typeface="Calibri" pitchFamily="34" charset="-122"/>
                 <a:cs typeface="Calibri" pitchFamily="34" charset="-120"/>
               </a:rPr>
-              <a:t>/file/d/1cI2pA7xqnanGGfHlQ9LuUI8YzXMpgM1h/</a:t>
-            </a:r>
-            <a:r>
-              <a:rPr lang="en-US" sz="1200" dirty="0" err="1">
-                <a:solidFill>
-                  <a:srgbClr val="333333"/>
+              <a:t>30 Aug 2026, 23:59 SGT — upload link in registration confirmation email</a:t>
+            </a:r>
+            <a:endParaRPr lang="en-US" sz="1200" dirty="0"/>
+          </a:p>
+        </p:txBody>
+      </p:sp>
+      <p:sp>
+        <p:nvSpPr>
+          <p:cNvPr id="22" name="Text 20"/>
+          <p:cNvSpPr/>
+          <p:nvPr/>
+        </p:nvSpPr>
+        <p:spPr>
+          <a:xfrm>
+            <a:off x="457200" y="3840480"/>
+            <a:ext cx="8229600" cy="502920"/>
+          </a:xfrm>
+          <a:prstGeom prst="rect">
+            <a:avLst/>
+          </a:prstGeom>
+          <a:noFill/>
+          <a:ln/>
+        </p:spPr>
+        <p:txBody>
+          <a:bodyPr wrap="square" lIns="0" tIns="0" rIns="0" bIns="0" rtlCol="0" anchor="ctr"/>
+          <a:lstStyle/>
+          <a:p>
+            <a:pPr indent="0" marL="0">
+              <a:buNone/>
+            </a:pPr>
+            <a:r>
+              <a:rPr lang="en-US" sz="1100" dirty="0">
+                <a:solidFill>
+                  <a:srgbClr val="666666"/>
                 </a:solidFill>
                 <a:latin typeface="Calibri" pitchFamily="34" charset="0"/>
                 <a:ea typeface="Calibri" pitchFamily="34" charset="-122"/>
                 <a:cs typeface="Calibri" pitchFamily="34" charset="-120"/>
               </a:rPr>
-              <a:t>view?usp</a:t>
-            </a:r>
-            <a:r>
-              <a:rPr lang="en-US" sz="1200" dirty="0">
-                <a:solidFill>
-                  <a:srgbClr val="333333"/>
+              <a:t>Public refs: MPA Maritime Singapore 2024 · Maritime Executive (PSA 1H 2024 ops) · Kickoff briefing 14 Aug · Telegram submission clarifications</a:t>
+            </a:r>
+            <a:endParaRPr lang="en-US" sz="1100" dirty="0"/>
+          </a:p>
+        </p:txBody>
+      </p:sp>
+      <p:sp>
+        <p:nvSpPr>
+          <p:cNvPr id="23" name="Text 21"/>
+          <p:cNvSpPr/>
+          <p:nvPr/>
+        </p:nvSpPr>
+        <p:spPr>
+          <a:xfrm>
+            <a:off x="457200" y="4828032"/>
+            <a:ext cx="6583680" cy="201168"/>
+          </a:xfrm>
+          <a:prstGeom prst="rect">
+            <a:avLst/>
+          </a:prstGeom>
+          <a:noFill/>
+          <a:ln/>
+        </p:spPr>
+        <p:txBody>
+          <a:bodyPr wrap="square" lIns="0" tIns="0" rIns="0" bIns="0" rtlCol="0" anchor="ctr"/>
+          <a:lstStyle/>
+          <a:p>
+            <a:pPr indent="0" marL="0">
+              <a:buNone/>
+            </a:pPr>
+            <a:r>
+              <a:rPr lang="en-US" sz="800" dirty="0">
+                <a:solidFill>
+                  <a:srgbClr val="666666"/>
                 </a:solidFill>
                 <a:latin typeface="Calibri" pitchFamily="34" charset="0"/>
                 <a:ea typeface="Calibri" pitchFamily="34" charset="-122"/>
                 <a:cs typeface="Calibri" pitchFamily="34" charset="-120"/>
               </a:rPr>
-              <a:t>=sharing</a:t>
-            </a:r>
-            <a:endParaRPr lang="en-US" sz="1200" dirty="0"/>
-          </a:p>
-        </p:txBody>
-      </p:sp>
-      <p:sp>
-        <p:nvSpPr>
-          <p:cNvPr id="14" name="Shape 12"/>
-          <p:cNvSpPr/>
-          <p:nvPr/>
-        </p:nvSpPr>
-        <p:spPr>
-          <a:xfrm>
-            <a:off x="457200" y="2377440"/>
-            <a:ext cx="2011680" cy="502920"/>
-          </a:xfrm>
-          <a:prstGeom prst="rect">
-            <a:avLst/>
-          </a:prstGeom>
-          <a:solidFill>
-            <a:srgbClr val="051C2C"/>
-          </a:solidFill>
-          <a:ln/>
-        </p:spPr>
-        <p:txBody>
-          <a:bodyPr/>
-          <a:lstStyle/>
-          <a:p>
-            <a:endParaRPr lang="en-US"/>
-          </a:p>
-        </p:txBody>
-      </p:sp>
-      <p:sp>
-        <p:nvSpPr>
-          <p:cNvPr id="15" name="Text 13"/>
-          <p:cNvSpPr/>
-          <p:nvPr/>
-        </p:nvSpPr>
-        <p:spPr>
-          <a:xfrm>
-            <a:off x="548640" y="2505456"/>
-            <a:ext cx="1828800" cy="274320"/>
-          </a:xfrm>
-          <a:prstGeom prst="rect">
-            <a:avLst/>
-          </a:prstGeom>
-          <a:noFill/>
-          <a:ln/>
-        </p:spPr>
-        <p:txBody>
-          <a:bodyPr wrap="square" lIns="0" tIns="0" rIns="0" bIns="0" rtlCol="0" anchor="ctr"/>
-          <a:lstStyle/>
-          <a:p>
-            <a:pPr marL="0" indent="0">
-              <a:buNone/>
-            </a:pPr>
-            <a:r>
-              <a:rPr lang="en-US" sz="1200" b="1" dirty="0">
-                <a:solidFill>
-                  <a:srgbClr val="FFFFFF"/>
-                </a:solidFill>
-                <a:latin typeface="Arial" pitchFamily="34" charset="0"/>
-                <a:ea typeface="Arial" pitchFamily="34" charset="-122"/>
-                <a:cs typeface="Arial" pitchFamily="34" charset="-120"/>
-              </a:rPr>
-              <a:t>Local demo</a:t>
-            </a:r>
-            <a:endParaRPr lang="en-US" sz="1200" dirty="0"/>
-          </a:p>
-        </p:txBody>
-      </p:sp>
-      <p:sp>
-        <p:nvSpPr>
-          <p:cNvPr id="16" name="Shape 14"/>
-          <p:cNvSpPr/>
-          <p:nvPr/>
-        </p:nvSpPr>
-        <p:spPr>
-          <a:xfrm>
-            <a:off x="2468880" y="2377440"/>
-            <a:ext cx="6217920" cy="502920"/>
-          </a:xfrm>
-          <a:prstGeom prst="rect">
-            <a:avLst/>
-          </a:prstGeom>
-          <a:solidFill>
-            <a:srgbClr val="F2F2F2"/>
-          </a:solidFill>
-          <a:ln/>
-        </p:spPr>
-        <p:txBody>
-          <a:bodyPr/>
-          <a:lstStyle/>
-          <a:p>
-            <a:endParaRPr lang="en-US"/>
-          </a:p>
-        </p:txBody>
-      </p:sp>
-      <p:sp>
-        <p:nvSpPr>
-          <p:cNvPr id="17" name="Text 15"/>
-          <p:cNvSpPr/>
-          <p:nvPr/>
-        </p:nvSpPr>
-        <p:spPr>
-          <a:xfrm>
-            <a:off x="2651760" y="2505456"/>
-            <a:ext cx="5852160" cy="274320"/>
-          </a:xfrm>
-          <a:prstGeom prst="rect">
-            <a:avLst/>
-          </a:prstGeom>
-          <a:noFill/>
-          <a:ln/>
-        </p:spPr>
-        <p:txBody>
-          <a:bodyPr wrap="square" lIns="0" tIns="0" rIns="0" bIns="0" rtlCol="0" anchor="ctr"/>
-          <a:lstStyle/>
-          <a:p>
-            <a:pPr marL="0" indent="0">
-              <a:buNone/>
-            </a:pPr>
-            <a:r>
-              <a:rPr lang="en-US" sz="1200" dirty="0">
-                <a:solidFill>
-                  <a:srgbClr val="333333"/>
-                </a:solidFill>
-                <a:latin typeface="Calibri" pitchFamily="34" charset="0"/>
-                <a:ea typeface="Calibri" pitchFamily="34" charset="-122"/>
-                <a:cs typeface="Calibri" pitchFamily="34" charset="-120"/>
-              </a:rPr>
-              <a:t>API :8000 · Console :5173 — see relay/README.md quick start</a:t>
-            </a:r>
-            <a:endParaRPr lang="en-US" sz="1200" dirty="0"/>
-          </a:p>
-        </p:txBody>
-      </p:sp>
-      <p:sp>
-        <p:nvSpPr>
-          <p:cNvPr id="19" name="Text 17"/>
-          <p:cNvSpPr/>
-          <p:nvPr/>
-        </p:nvSpPr>
-        <p:spPr>
-          <a:xfrm>
-            <a:off x="548640" y="3145536"/>
-            <a:ext cx="1828800" cy="274320"/>
-          </a:xfrm>
-          <a:prstGeom prst="rect">
-            <a:avLst/>
-          </a:prstGeom>
-          <a:noFill/>
-          <a:ln/>
-        </p:spPr>
-        <p:txBody>
-          <a:bodyPr wrap="square" lIns="0" tIns="0" rIns="0" bIns="0" rtlCol="0" anchor="ctr"/>
-          <a:lstStyle/>
-          <a:p>
-            <a:pPr marL="0" indent="0">
-              <a:buNone/>
-            </a:pPr>
-            <a:r>
-              <a:rPr lang="en-US" sz="1200" b="1" dirty="0">
-                <a:solidFill>
-                  <a:srgbClr val="FFFFFF"/>
-                </a:solidFill>
-                <a:latin typeface="Arial" pitchFamily="34" charset="0"/>
-                <a:ea typeface="Arial" pitchFamily="34" charset="-122"/>
-                <a:cs typeface="Arial" pitchFamily="34" charset="-120"/>
-              </a:rPr>
-              <a:t>Submit by</a:t>
-            </a:r>
-            <a:endParaRPr lang="en-US" sz="1200" dirty="0"/>
-          </a:p>
-        </p:txBody>
-      </p:sp>
-      <p:sp>
-        <p:nvSpPr>
-          <p:cNvPr id="22" name="Text 20"/>
-          <p:cNvSpPr/>
-          <p:nvPr/>
-        </p:nvSpPr>
-        <p:spPr>
-          <a:xfrm>
-            <a:off x="457200" y="3840480"/>
-            <a:ext cx="8229600" cy="502920"/>
-          </a:xfrm>
-          <a:prstGeom prst="rect">
-            <a:avLst/>
-          </a:prstGeom>
-          <a:noFill/>
-          <a:ln/>
-        </p:spPr>
-        <p:txBody>
-          <a:bodyPr wrap="square" lIns="0" tIns="0" rIns="0" bIns="0" rtlCol="0" anchor="ctr"/>
-          <a:lstStyle/>
-          <a:p>
-            <a:pPr marL="0" indent="0">
-              <a:buNone/>
-            </a:pPr>
-            <a:r>
-              <a:rPr lang="en-US" sz="1100" dirty="0">
-                <a:solidFill>
-                  <a:srgbClr val="666666"/>
-                </a:solidFill>
-                <a:latin typeface="Calibri" pitchFamily="34" charset="0"/>
-                <a:ea typeface="Calibri" pitchFamily="34" charset="-122"/>
-                <a:cs typeface="Calibri" pitchFamily="34" charset="-120"/>
-              </a:rPr>
-              <a:t>Public refs: MPA Maritime Singapore 2024 · Maritime Executive (PSA 1H 2024 ops) · Kickoff briefing 14 Aug · Telegram submission clarifications</a:t>
-            </a:r>
-            <a:endParaRPr lang="en-US" sz="1100" dirty="0"/>
-          </a:p>
-        </p:txBody>
-      </p:sp>
-      <p:sp>
-        <p:nvSpPr>
-          <p:cNvPr id="23" name="Text 21"/>
-          <p:cNvSpPr/>
-          <p:nvPr/>
-        </p:nvSpPr>
-        <p:spPr>
-          <a:xfrm>
-            <a:off x="457200" y="4828032"/>
-            <a:ext cx="6583680" cy="201168"/>
-          </a:xfrm>
-          <a:prstGeom prst="rect">
-            <a:avLst/>
-          </a:prstGeom>
-          <a:noFill/>
-          <a:ln/>
-        </p:spPr>
-        <p:txBody>
-          <a:bodyPr wrap="square" lIns="0" tIns="0" rIns="0" bIns="0" rtlCol="0" anchor="ctr"/>
-          <a:lstStyle/>
-          <a:p>
-            <a:pPr marL="0" indent="0">
-              <a:buNone/>
-            </a:pPr>
-            <a:r>
-              <a:rPr lang="en-US" sz="800" dirty="0">
-                <a:solidFill>
-                  <a:srgbClr val="666666"/>
-                </a:solidFill>
-                <a:latin typeface="Calibri" pitchFamily="34" charset="0"/>
-                <a:ea typeface="Calibri" pitchFamily="34" charset="-122"/>
-                <a:cs typeface="Calibri" pitchFamily="34" charset="-120"/>
-              </a:rPr>
               <a:t>Source: Organiser reminder 27 Aug — submit via confirmation email before 30 Aug 23:59 SGT</a:t>
             </a:r>
             <a:endParaRPr lang="en-US" sz="800" dirty="0"/>
@@ -6358,7 +6319,7 @@
           <a:bodyPr wrap="square" lIns="0" tIns="0" rIns="0" bIns="0" rtlCol="0" anchor="ctr"/>
           <a:lstStyle/>
           <a:p>
-            <a:pPr marL="0" indent="0" algn="r">
+            <a:pPr algn="r" indent="0" marL="0">
               <a:buNone/>
             </a:pPr>
             <a:r>
@@ -6420,13 +6381,6 @@
           </a:solidFill>
           <a:ln/>
         </p:spPr>
-        <p:txBody>
-          <a:bodyPr/>
-          <a:lstStyle/>
-          <a:p>
-            <a:endParaRPr lang="en-US"/>
-          </a:p>
-        </p:txBody>
       </p:sp>
       <p:sp>
         <p:nvSpPr>
@@ -6449,7 +6403,7 @@
           <a:bodyPr wrap="square" lIns="0" tIns="0" rIns="0" bIns="0" rtlCol="0" anchor="t"/>
           <a:lstStyle/>
           <a:p>
-            <a:pPr marL="0" indent="0">
+            <a:pPr indent="0" marL="0">
               <a:buNone/>
             </a:pPr>
             <a:r>
@@ -6461,7 +6415,7 @@
                 <a:ea typeface="Arial" pitchFamily="34" charset="-122"/>
                 <a:cs typeface="Arial" pitchFamily="34" charset="-120"/>
               </a:rPr>
-              <a:t>We recommend RELAY: detect connection risk, orchestrate recovery, and gate high-impact moves</a:t>
+              <a:t>RELAY scores connection risk, runs recovery options, and waits for approval before yard moves</a:t>
             </a:r>
             <a:endParaRPr lang="en-US" sz="1800" dirty="0"/>
           </a:p>
@@ -6488,7 +6442,7 @@
           <a:bodyPr wrap="square" lIns="0" tIns="0" rIns="0" bIns="0" rtlCol="0" anchor="ctr"/>
           <a:lstStyle/>
           <a:p>
-            <a:pPr marL="0" indent="0">
+            <a:pPr indent="0" marL="0">
               <a:buNone/>
             </a:pPr>
             <a:r>
@@ -6500,7 +6454,7 @@
                 <a:ea typeface="Calibri" pitchFamily="34" charset="-122"/>
                 <a:cs typeface="Calibri" pitchFamily="34" charset="-120"/>
               </a:rPr>
-              <a:t>Executive summary — three supporting arguments (MECE)</a:t>
+              <a:t>Three things to know upfront</a:t>
             </a:r>
             <a:endParaRPr lang="en-US" sz="1200" dirty="0"/>
           </a:p>
@@ -6525,13 +6479,6 @@
           </a:solidFill>
           <a:ln/>
         </p:spPr>
-        <p:txBody>
-          <a:bodyPr/>
-          <a:lstStyle/>
-          <a:p>
-            <a:endParaRPr lang="en-US"/>
-          </a:p>
-        </p:txBody>
       </p:sp>
       <p:sp>
         <p:nvSpPr>
@@ -6554,7 +6501,7 @@
           <a:bodyPr wrap="square" lIns="0" tIns="0" rIns="0" bIns="0" rtlCol="0" anchor="ctr"/>
           <a:lstStyle/>
           <a:p>
-            <a:pPr marL="0" indent="0">
+            <a:pPr indent="0" marL="0">
               <a:buNone/>
             </a:pPr>
             <a:r>
@@ -6593,7 +6540,7 @@
           <a:bodyPr wrap="square" lIns="0" tIns="0" rIns="0" bIns="0" rtlCol="0" anchor="ctr"/>
           <a:lstStyle/>
           <a:p>
-            <a:pPr marL="0" indent="0">
+            <a:pPr indent="0" marL="0">
               <a:buNone/>
             </a:pPr>
             <a:r>
@@ -6605,7 +6552,7 @@
                 <a:ea typeface="Arial" pitchFamily="34" charset="-122"/>
                 <a:cs typeface="Arial" pitchFamily="34" charset="-120"/>
               </a:rPr>
-              <a:t>Problem is connection continuity</a:t>
+              <a:t>The problem is missed connections</a:t>
             </a:r>
             <a:endParaRPr lang="en-US" sz="1400" dirty="0"/>
           </a:p>
@@ -6632,7 +6579,7 @@
           <a:bodyPr wrap="square" lIns="0" tIns="0" rIns="0" bIns="0" rtlCol="0" anchor="ctr"/>
           <a:lstStyle/>
           <a:p>
-            <a:pPr marL="0" indent="0">
+            <a:pPr indent="0" marL="0">
               <a:buNone/>
             </a:pPr>
             <a:r>
@@ -6644,7 +6591,7 @@
                 <a:ea typeface="Calibri" pitchFamily="34" charset="-122"/>
                 <a:cs typeface="Calibri" pitchFamily="34" charset="-120"/>
               </a:rPr>
-              <a:t>At a T/S hub, ETA slips and crane shocks push boxes into the miss window — cascading network delay, dwell, and SLA exposure.</a:t>
+              <a:t>At a transshipment hub, schedule slips push boxes past their outbound cutoff. Premium, reefer, and DG cargo tend to hurt first.</a:t>
             </a:r>
             <a:endParaRPr lang="en-US" sz="1200" dirty="0"/>
           </a:p>
@@ -6669,13 +6616,6 @@
           </a:solidFill>
           <a:ln/>
         </p:spPr>
-        <p:txBody>
-          <a:bodyPr/>
-          <a:lstStyle/>
-          <a:p>
-            <a:endParaRPr lang="en-US"/>
-          </a:p>
-        </p:txBody>
       </p:sp>
       <p:sp>
         <p:nvSpPr>
@@ -6698,7 +6638,7 @@
           <a:bodyPr wrap="square" lIns="0" tIns="0" rIns="0" bIns="0" rtlCol="0" anchor="ctr"/>
           <a:lstStyle/>
           <a:p>
-            <a:pPr marL="0" indent="0">
+            <a:pPr indent="0" marL="0">
               <a:buNone/>
             </a:pPr>
             <a:r>
@@ -6737,7 +6677,7 @@
           <a:bodyPr wrap="square" lIns="0" tIns="0" rIns="0" bIns="0" rtlCol="0" anchor="ctr"/>
           <a:lstStyle/>
           <a:p>
-            <a:pPr marL="0" indent="0">
+            <a:pPr indent="0" marL="0">
               <a:buNone/>
             </a:pPr>
             <a:r>
@@ -6749,7 +6689,7 @@
                 <a:ea typeface="Arial" pitchFamily="34" charset="-122"/>
                 <a:cs typeface="Arial" pitchFamily="34" charset="-120"/>
               </a:rPr>
-              <a:t>Agentic loop with tiered autonomy</a:t>
+              <a:t>Agents do the thinking; humans approve the moves</a:t>
             </a:r>
             <a:endParaRPr lang="en-US" sz="1400" dirty="0"/>
           </a:p>
@@ -6776,7 +6716,7 @@
           <a:bodyPr wrap="square" lIns="0" tIns="0" rIns="0" bIns="0" rtlCol="0" anchor="ctr"/>
           <a:lstStyle/>
           <a:p>
-            <a:pPr marL="0" indent="0">
+            <a:pPr indent="0" marL="0">
               <a:buNone/>
             </a:pPr>
             <a:r>
@@ -6788,7 +6728,7 @@
                 <a:ea typeface="Calibri" pitchFamily="34" charset="-122"/>
                 <a:cs typeface="Calibri" pitchFamily="34" charset="-120"/>
               </a:rPr>
-              <a:t>Six agents run sense→score→plan→critique→execute. Physical/commercial moves require planner approval tokens by design.</a:t>
+              <a:t>Six agents sense, score, plan, and critique. Restow orders and cutoff changes need an explicit planner sign-off.</a:t>
             </a:r>
             <a:endParaRPr lang="en-US" sz="1200" dirty="0"/>
           </a:p>
@@ -6813,13 +6753,6 @@
           </a:solidFill>
           <a:ln/>
         </p:spPr>
-        <p:txBody>
-          <a:bodyPr/>
-          <a:lstStyle/>
-          <a:p>
-            <a:endParaRPr lang="en-US"/>
-          </a:p>
-        </p:txBody>
       </p:sp>
       <p:sp>
         <p:nvSpPr>
@@ -6842,7 +6775,7 @@
           <a:bodyPr wrap="square" lIns="0" tIns="0" rIns="0" bIns="0" rtlCol="0" anchor="ctr"/>
           <a:lstStyle/>
           <a:p>
-            <a:pPr marL="0" indent="0">
+            <a:pPr indent="0" marL="0">
               <a:buNone/>
             </a:pPr>
             <a:r>
@@ -6881,7 +6814,7 @@
           <a:bodyPr wrap="square" lIns="0" tIns="0" rIns="0" bIns="0" rtlCol="0" anchor="ctr"/>
           <a:lstStyle/>
           <a:p>
-            <a:pPr marL="0" indent="0">
+            <a:pPr indent="0" marL="0">
               <a:buNone/>
             </a:pPr>
             <a:r>
@@ -6893,7 +6826,7 @@
                 <a:ea typeface="Arial" pitchFamily="34" charset="-122"/>
                 <a:cs typeface="Arial" pitchFamily="34" charset="-120"/>
               </a:rPr>
-              <a:t>Built to the scoring criteria</a:t>
+              <a:t>Working demo, not a slide deck idea</a:t>
             </a:r>
             <a:endParaRPr lang="en-US" sz="1400" dirty="0"/>
           </a:p>
@@ -6920,7 +6853,7 @@
           <a:bodyPr wrap="square" lIns="0" tIns="0" rIns="0" bIns="0" rtlCol="0" anchor="ctr"/>
           <a:lstStyle/>
           <a:p>
-            <a:pPr marL="0" indent="0">
+            <a:pPr indent="0" marL="0">
               <a:buNone/>
             </a:pPr>
             <a:r>
@@ -6932,7 +6865,7 @@
                 <a:ea typeface="Calibri" pitchFamily="34" charset="-122"/>
                 <a:cs typeface="Calibri" pitchFamily="34" charset="-120"/>
               </a:rPr>
-              <a:t>Working E2E workflow, T/S-first originality, responsible controls (retries/fallback/audit), and a clear ops narrative.</a:t>
+              <a:t>End-to-end console with three scenarios, tool traces, critic dissent, and fallback when APIs fail.</a:t>
             </a:r>
             <a:endParaRPr lang="en-US" sz="1200" dirty="0"/>
           </a:p>
@@ -6959,7 +6892,7 @@
           <a:bodyPr wrap="square" lIns="0" tIns="0" rIns="0" bIns="0" rtlCol="0" anchor="ctr"/>
           <a:lstStyle/>
           <a:p>
-            <a:pPr marL="0" indent="0">
+            <a:pPr indent="0" marL="0">
               <a:buNone/>
             </a:pPr>
             <a:r>
@@ -6998,7 +6931,7 @@
           <a:bodyPr wrap="square" lIns="0" tIns="0" rIns="0" bIns="0" rtlCol="0" anchor="ctr"/>
           <a:lstStyle/>
           <a:p>
-            <a:pPr marL="0" indent="0" algn="r">
+            <a:pPr algn="r" indent="0" marL="0">
               <a:buNone/>
             </a:pPr>
             <a:r>
@@ -7060,13 +6993,6 @@
           </a:solidFill>
           <a:ln/>
         </p:spPr>
-        <p:txBody>
-          <a:bodyPr/>
-          <a:lstStyle/>
-          <a:p>
-            <a:endParaRPr lang="en-US"/>
-          </a:p>
-        </p:txBody>
       </p:sp>
       <p:sp>
         <p:nvSpPr>
@@ -7089,7 +7015,7 @@
           <a:bodyPr wrap="square" lIns="0" tIns="0" rIns="0" bIns="0" rtlCol="0" anchor="t"/>
           <a:lstStyle/>
           <a:p>
-            <a:pPr marL="0" indent="0">
+            <a:pPr indent="0" marL="0">
               <a:buNone/>
             </a:pPr>
             <a:r>
@@ -7101,7 +7027,7 @@
                 <a:ea typeface="Arial" pitchFamily="34" charset="-122"/>
                 <a:cs typeface="Arial" pitchFamily="34" charset="-120"/>
               </a:rPr>
-              <a:t>Transshipment economics break when off-schedule bunching erodes the connection buffer</a:t>
+              <a:t>Most PSA throughput is transshipment — and schedules are rarely on time</a:t>
             </a:r>
             <a:endParaRPr lang="en-US" sz="1800" dirty="0"/>
           </a:p>
@@ -7126,13 +7052,6 @@
           </a:solidFill>
           <a:ln/>
         </p:spPr>
-        <p:txBody>
-          <a:bodyPr/>
-          <a:lstStyle/>
-          <a:p>
-            <a:endParaRPr lang="en-US"/>
-          </a:p>
-        </p:txBody>
       </p:sp>
       <p:sp>
         <p:nvSpPr>
@@ -7155,7 +7074,7 @@
           <a:bodyPr wrap="square" lIns="0" tIns="0" rIns="0" bIns="0" rtlCol="0" anchor="ctr"/>
           <a:lstStyle/>
           <a:p>
-            <a:pPr marL="0" indent="0">
+            <a:pPr indent="0" marL="0">
               <a:buNone/>
             </a:pPr>
             <a:r>
@@ -7194,7 +7113,7 @@
           <a:bodyPr wrap="square" lIns="0" tIns="0" rIns="0" bIns="0" rtlCol="0" anchor="ctr"/>
           <a:lstStyle/>
           <a:p>
-            <a:pPr marL="0" indent="0">
+            <a:pPr indent="0" marL="0">
               <a:buNone/>
             </a:pPr>
             <a:r>
@@ -7231,13 +7150,6 @@
           </a:solidFill>
           <a:ln/>
         </p:spPr>
-        <p:txBody>
-          <a:bodyPr/>
-          <a:lstStyle/>
-          <a:p>
-            <a:endParaRPr lang="en-US"/>
-          </a:p>
-        </p:txBody>
       </p:sp>
       <p:sp>
         <p:nvSpPr>
@@ -7260,7 +7172,7 @@
           <a:bodyPr wrap="square" lIns="0" tIns="0" rIns="0" bIns="0" rtlCol="0" anchor="ctr"/>
           <a:lstStyle/>
           <a:p>
-            <a:pPr marL="0" indent="0" algn="ctr">
+            <a:pPr algn="ctr" indent="0" marL="0">
               <a:buNone/>
             </a:pPr>
             <a:r>
@@ -7297,13 +7209,6 @@
           </a:solidFill>
           <a:ln/>
         </p:spPr>
-        <p:txBody>
-          <a:bodyPr/>
-          <a:lstStyle/>
-          <a:p>
-            <a:endParaRPr lang="en-US"/>
-          </a:p>
-        </p:txBody>
       </p:sp>
       <p:sp>
         <p:nvSpPr>
@@ -7326,7 +7231,7 @@
           <a:bodyPr wrap="square" lIns="0" tIns="0" rIns="0" bIns="0" rtlCol="0" anchor="ctr"/>
           <a:lstStyle/>
           <a:p>
-            <a:pPr marL="0" indent="0">
+            <a:pPr indent="0" marL="0">
               <a:buNone/>
             </a:pPr>
             <a:r>
@@ -7363,13 +7268,6 @@
           </a:solidFill>
           <a:ln/>
         </p:spPr>
-        <p:txBody>
-          <a:bodyPr/>
-          <a:lstStyle/>
-          <a:p>
-            <a:endParaRPr lang="en-US"/>
-          </a:p>
-        </p:txBody>
       </p:sp>
       <p:sp>
         <p:nvSpPr>
@@ -7392,7 +7290,7 @@
           <a:bodyPr wrap="square" lIns="0" tIns="0" rIns="0" bIns="0" rtlCol="0" anchor="ctr"/>
           <a:lstStyle/>
           <a:p>
-            <a:pPr marL="0" indent="0" algn="ctr">
+            <a:pPr algn="ctr" indent="0" marL="0">
               <a:buNone/>
             </a:pPr>
             <a:r>
@@ -7429,13 +7327,6 @@
           </a:solidFill>
           <a:ln/>
         </p:spPr>
-        <p:txBody>
-          <a:bodyPr/>
-          <a:lstStyle/>
-          <a:p>
-            <a:endParaRPr lang="en-US"/>
-          </a:p>
-        </p:txBody>
       </p:sp>
       <p:sp>
         <p:nvSpPr>
@@ -7458,7 +7349,7 @@
           <a:bodyPr wrap="square" lIns="0" tIns="0" rIns="0" bIns="0" rtlCol="0" anchor="ctr"/>
           <a:lstStyle/>
           <a:p>
-            <a:pPr marL="0" indent="0">
+            <a:pPr indent="0" marL="0">
               <a:buNone/>
             </a:pPr>
             <a:r>
@@ -7495,13 +7386,6 @@
           </a:solidFill>
           <a:ln/>
         </p:spPr>
-        <p:txBody>
-          <a:bodyPr/>
-          <a:lstStyle/>
-          <a:p>
-            <a:endParaRPr lang="en-US"/>
-          </a:p>
-        </p:txBody>
       </p:sp>
       <p:sp>
         <p:nvSpPr>
@@ -7524,7 +7408,7 @@
           <a:bodyPr wrap="square" lIns="0" tIns="0" rIns="0" bIns="0" rtlCol="0" anchor="ctr"/>
           <a:lstStyle/>
           <a:p>
-            <a:pPr marL="0" indent="0" algn="ctr">
+            <a:pPr algn="ctr" indent="0" marL="0">
               <a:buNone/>
             </a:pPr>
             <a:r>
@@ -7561,13 +7445,6 @@
           </a:solidFill>
           <a:ln/>
         </p:spPr>
-        <p:txBody>
-          <a:bodyPr/>
-          <a:lstStyle/>
-          <a:p>
-            <a:endParaRPr lang="en-US"/>
-          </a:p>
-        </p:txBody>
       </p:sp>
       <p:sp>
         <p:nvSpPr>
@@ -7590,7 +7467,7 @@
           <a:bodyPr wrap="square" lIns="0" tIns="0" rIns="0" bIns="0" rtlCol="0" anchor="ctr"/>
           <a:lstStyle/>
           <a:p>
-            <a:pPr marL="0" indent="0">
+            <a:pPr indent="0" marL="0">
               <a:buNone/>
             </a:pPr>
             <a:r>
@@ -7627,13 +7504,6 @@
           </a:solidFill>
           <a:ln/>
         </p:spPr>
-        <p:txBody>
-          <a:bodyPr/>
-          <a:lstStyle/>
-          <a:p>
-            <a:endParaRPr lang="en-US"/>
-          </a:p>
-        </p:txBody>
       </p:sp>
       <p:sp>
         <p:nvSpPr>
@@ -7656,7 +7526,7 @@
           <a:bodyPr wrap="square" lIns="0" tIns="0" rIns="0" bIns="0" rtlCol="0" anchor="ctr"/>
           <a:lstStyle/>
           <a:p>
-            <a:pPr marL="0" indent="0" algn="ctr">
+            <a:pPr algn="ctr" indent="0" marL="0">
               <a:buNone/>
             </a:pPr>
             <a:r>
@@ -7693,13 +7563,6 @@
           </a:solidFill>
           <a:ln/>
         </p:spPr>
-        <p:txBody>
-          <a:bodyPr/>
-          <a:lstStyle/>
-          <a:p>
-            <a:endParaRPr lang="en-US"/>
-          </a:p>
-        </p:txBody>
       </p:sp>
       <p:sp>
         <p:nvSpPr>
@@ -7722,7 +7585,7 @@
           <a:bodyPr wrap="square" lIns="0" tIns="0" rIns="0" bIns="0" rtlCol="0" anchor="ctr"/>
           <a:lstStyle/>
           <a:p>
-            <a:pPr marL="0" indent="0">
+            <a:pPr indent="0" marL="0">
               <a:buNone/>
             </a:pPr>
             <a:r>
@@ -7734,7 +7597,7 @@
                 <a:ea typeface="Calibri" pitchFamily="34" charset="-122"/>
                 <a:cs typeface="Calibri" pitchFamily="34" charset="-120"/>
               </a:rPr>
-              <a:t>Hub value = connection reliability under volatility, not berth count alone</a:t>
+              <a:t>The hub wins on connection reliability when things go wrong, not just berth capacity</a:t>
             </a:r>
             <a:endParaRPr lang="en-US" sz="1200" dirty="0"/>
           </a:p>
@@ -7761,7 +7624,7 @@
           <a:bodyPr wrap="square" lIns="0" tIns="0" rIns="0" bIns="0" rtlCol="0" anchor="ctr"/>
           <a:lstStyle/>
           <a:p>
-            <a:pPr marL="0" indent="0">
+            <a:pPr indent="0" marL="0">
               <a:buNone/>
             </a:pPr>
             <a:r>
@@ -7800,7 +7663,7 @@
           <a:bodyPr wrap="square" lIns="0" tIns="0" rIns="0" bIns="0" rtlCol="0" anchor="ctr"/>
           <a:lstStyle/>
           <a:p>
-            <a:pPr marL="0" indent="0" algn="r">
+            <a:pPr algn="r" indent="0" marL="0">
               <a:buNone/>
             </a:pPr>
             <a:r>
@@ -7818,143 +7681,11 @@
           </a:p>
         </p:txBody>
       </p:sp>
-      <p:pic>
-        <p:nvPicPr>
-          <p:cNvPr id="32" name="Audio 31">
-            <a:extLst>
-              <a:ext uri="{FF2B5EF4-FFF2-40B4-BE49-F238E27FC236}">
-                <a16:creationId xmlns:a16="http://schemas.microsoft.com/office/drawing/2014/main" id="{EFC3FCA7-774F-97D2-6167-4A5B3D11EB8A}"/>
-              </a:ext>
-            </a:extLst>
-          </p:cNvPr>
-          <p:cNvPicPr>
-            <a:picLocks noChangeAspect="1"/>
-          </p:cNvPicPr>
-          <p:nvPr>
-            <a:audioFile r:link="rId2"/>
-            <p:extLst>
-              <p:ext uri="{DAA4B4D4-6D71-4841-9C94-3DE7FCFB9230}">
-                <p14:media xmlns:p14="http://schemas.microsoft.com/office/powerpoint/2010/main" r:embed="rId1"/>
-              </p:ext>
-            </p:extLst>
-          </p:nvPr>
-        </p:nvPicPr>
-        <p:blipFill>
-          <a:blip r:embed="rId5"/>
-          <a:stretch>
-            <a:fillRect/>
-          </a:stretch>
-        </p:blipFill>
-        <p:spPr>
-          <a:xfrm>
-            <a:off x="8178800" y="4178300"/>
-            <a:ext cx="812800" cy="812800"/>
-          </a:xfrm>
-          <a:prstGeom prst="rect">
-            <a:avLst/>
-          </a:prstGeom>
-        </p:spPr>
-      </p:pic>
     </p:spTree>
   </p:cSld>
   <p:clrMapOvr>
     <a:masterClrMapping/>
   </p:clrMapOvr>
-  <mc:AlternateContent xmlns:mc="http://schemas.openxmlformats.org/markup-compatibility/2006">
-    <mc:Choice xmlns:p14="http://schemas.microsoft.com/office/powerpoint/2010/main" Requires="p14">
-      <p:transition spd="slow" p14:dur="2000" advTm="37231"/>
-    </mc:Choice>
-    <mc:Fallback>
-      <p:transition spd="slow" advTm="37231"/>
-    </mc:Fallback>
-  </mc:AlternateContent>
-  <p:timing>
-    <p:tnLst>
-      <p:par>
-        <p:cTn id="1" dur="indefinite" restart="never" nodeType="tmRoot">
-          <p:childTnLst>
-            <p:seq concurrent="1" nextAc="seek">
-              <p:cTn id="2" dur="indefinite" nodeType="mainSeq">
-                <p:childTnLst>
-                  <p:par>
-                    <p:cTn id="3" fill="hold">
-                      <p:stCondLst>
-                        <p:cond delay="indefinite"/>
-                        <p:cond evt="onBegin" delay="0">
-                          <p:tn val="2"/>
-                        </p:cond>
-                      </p:stCondLst>
-                      <p:childTnLst>
-                        <p:par>
-                          <p:cTn id="4" fill="hold">
-                            <p:stCondLst>
-                              <p:cond delay="0"/>
-                            </p:stCondLst>
-                            <p:childTnLst>
-                              <p:par>
-                                <p:cTn id="5" presetID="1" presetClass="mediacall" presetSubtype="0" fill="hold" nodeType="afterEffect">
-                                  <p:stCondLst>
-                                    <p:cond delay="0"/>
-                                  </p:stCondLst>
-                                  <p:childTnLst>
-                                    <p:cmd type="call" cmd="playFrom(0.0)">
-                                      <p:cBhvr>
-                                        <p:cTn id="6" dur="1" fill="hold"/>
-                                        <p:tgtEl>
-                                          <p:spTgt spid="32"/>
-                                        </p:tgtEl>
-                                      </p:cBhvr>
-                                    </p:cmd>
-                                  </p:childTnLst>
-                                </p:cTn>
-                              </p:par>
-                            </p:childTnLst>
-                          </p:cTn>
-                        </p:par>
-                      </p:childTnLst>
-                    </p:cTn>
-                  </p:par>
-                </p:childTnLst>
-              </p:cTn>
-              <p:prevCondLst>
-                <p:cond evt="onPrev" delay="0">
-                  <p:tgtEl>
-                    <p:sldTgt/>
-                  </p:tgtEl>
-                </p:cond>
-              </p:prevCondLst>
-              <p:nextCondLst>
-                <p:cond evt="onNext" delay="0">
-                  <p:tgtEl>
-                    <p:sldTgt/>
-                  </p:tgtEl>
-                </p:cond>
-              </p:nextCondLst>
-            </p:seq>
-            <p:audio isNarration="1">
-              <p:cMediaNode vol="80000" showWhenStopped="0">
-                <p:cTn id="7" fill="hold" display="0">
-                  <p:stCondLst>
-                    <p:cond delay="indefinite"/>
-                  </p:stCondLst>
-                  <p:endCondLst>
-                    <p:cond evt="onStopAudio" delay="0">
-                      <p:tgtEl>
-                        <p:sldTgt/>
-                      </p:tgtEl>
-                    </p:cond>
-                  </p:endCondLst>
-                </p:cTn>
-                <p:tgtEl>
-                  <p:spTgt spid="32"/>
-                </p:tgtEl>
-              </p:cMediaNode>
-            </p:audio>
-          </p:childTnLst>
-        </p:cTn>
-      </p:par>
-    </p:tnLst>
-  </p:timing>
 </p:sld>
 </file>
 
@@ -7994,13 +7725,6 @@
           </a:solidFill>
           <a:ln/>
         </p:spPr>
-        <p:txBody>
-          <a:bodyPr/>
-          <a:lstStyle/>
-          <a:p>
-            <a:endParaRPr lang="en-US"/>
-          </a:p>
-        </p:txBody>
       </p:sp>
       <p:sp>
         <p:nvSpPr>
@@ -8023,7 +7747,7 @@
           <a:bodyPr wrap="square" lIns="0" tIns="0" rIns="0" bIns="0" rtlCol="0" anchor="t"/>
           <a:lstStyle/>
           <a:p>
-            <a:pPr marL="0" indent="0">
+            <a:pPr indent="0" marL="0">
               <a:buNone/>
             </a:pPr>
             <a:r>
@@ -8035,7 +7759,7 @@
                 <a:ea typeface="Arial" pitchFamily="34" charset="-122"/>
                 <a:cs typeface="Arial" pitchFamily="34" charset="-120"/>
               </a:rPr>
-              <a:t>Recovery today is fragmented — and full autonomy would be the wrong risk trade</a:t>
+              <a:t>Planners stitch this together manually today — full autonomy would be worse</a:t>
             </a:r>
             <a:endParaRPr lang="en-US" sz="1800" dirty="0"/>
           </a:p>
@@ -8060,13 +7784,6 @@
           </a:solidFill>
           <a:ln/>
         </p:spPr>
-        <p:txBody>
-          <a:bodyPr/>
-          <a:lstStyle/>
-          <a:p>
-            <a:endParaRPr lang="en-US"/>
-          </a:p>
-        </p:txBody>
       </p:sp>
       <p:sp>
         <p:nvSpPr>
@@ -8089,7 +7806,7 @@
           <a:bodyPr wrap="square" lIns="0" tIns="0" rIns="0" bIns="0" rtlCol="0" anchor="ctr"/>
           <a:lstStyle/>
           <a:p>
-            <a:pPr marL="0" indent="0">
+            <a:pPr indent="0" marL="0">
               <a:buNone/>
             </a:pPr>
             <a:r>
@@ -8149,7 +7866,7 @@
             <a:endParaRPr lang="en-US" sz="1300" dirty="0"/>
           </a:p>
           <a:p>
-            <a:pPr marL="0" indent="0">
+            <a:pPr indent="0" marL="0">
               <a:spcAft>
                 <a:spcPts val="800"/>
               </a:spcAft>
@@ -8169,7 +7886,7 @@
             <a:endParaRPr lang="en-US" sz="1300" dirty="0"/>
           </a:p>
           <a:p>
-            <a:pPr marL="0" indent="0">
+            <a:pPr indent="0" marL="0">
               <a:spcAft>
                 <a:spcPts val="800"/>
               </a:spcAft>
@@ -8189,7 +7906,7 @@
             <a:endParaRPr lang="en-US" sz="1300" dirty="0"/>
           </a:p>
           <a:p>
-            <a:pPr marL="0" indent="0">
+            <a:pPr indent="0" marL="0">
               <a:spcAft>
                 <a:spcPts val="800"/>
               </a:spcAft>
@@ -8229,13 +7946,6 @@
           </a:solidFill>
           <a:ln/>
         </p:spPr>
-        <p:txBody>
-          <a:bodyPr/>
-          <a:lstStyle/>
-          <a:p>
-            <a:endParaRPr lang="en-US"/>
-          </a:p>
-        </p:txBody>
       </p:sp>
       <p:sp>
         <p:nvSpPr>
@@ -8258,7 +7968,7 @@
           <a:bodyPr wrap="square" lIns="0" tIns="0" rIns="0" bIns="0" rtlCol="0" anchor="ctr"/>
           <a:lstStyle/>
           <a:p>
-            <a:pPr marL="0" indent="0">
+            <a:pPr indent="0" marL="0">
               <a:buNone/>
             </a:pPr>
             <a:r>
@@ -8270,7 +7980,7 @@
                 <a:ea typeface="Arial" pitchFamily="34" charset="-122"/>
                 <a:cs typeface="Arial" pitchFamily="34" charset="-120"/>
               </a:rPr>
-              <a:t>Wrong answer</a:t>
+              <a:t>What we avoided</a:t>
             </a:r>
             <a:endParaRPr lang="en-US" sz="1400" dirty="0"/>
           </a:p>
@@ -8313,12 +8023,12 @@
                 <a:ea typeface="Calibri" pitchFamily="34" charset="-122"/>
                 <a:cs typeface="Calibri" pitchFamily="34" charset="-120"/>
               </a:rPr>
-              <a:t>Maximise autonomy for its own sake</a:t>
+              <a:t>Autonomy for its own sake</a:t>
             </a:r>
             <a:endParaRPr lang="en-US" sz="1300" dirty="0"/>
           </a:p>
           <a:p>
-            <a:pPr marL="0" indent="0">
+            <a:pPr indent="0" marL="0">
               <a:spcAft>
                 <a:spcPts val="800"/>
               </a:spcAft>
@@ -8333,12 +8043,12 @@
                 <a:ea typeface="Calibri" pitchFamily="34" charset="-122"/>
                 <a:cs typeface="Calibri" pitchFamily="34" charset="-120"/>
               </a:rPr>
-              <a:t>Chatbot over ops without tool gates</a:t>
+              <a:t>A chatbot with no tool or approval gates</a:t>
             </a:r>
             <a:endParaRPr lang="en-US" sz="1300" dirty="0"/>
           </a:p>
           <a:p>
-            <a:pPr marL="0" indent="0">
+            <a:pPr indent="0" marL="0">
               <a:spcAft>
                 <a:spcPts val="800"/>
               </a:spcAft>
@@ -8353,12 +8063,12 @@
                 <a:ea typeface="Calibri" pitchFamily="34" charset="-122"/>
                 <a:cs typeface="Calibri" pitchFamily="34" charset="-120"/>
               </a:rPr>
-              <a:t>Silent physical moves on incomplete data</a:t>
+              <a:t>Silent yard moves on stale data</a:t>
             </a:r>
             <a:endParaRPr lang="en-US" sz="1300" dirty="0"/>
           </a:p>
           <a:p>
-            <a:pPr marL="0" indent="0">
+            <a:pPr indent="0" marL="0">
               <a:spcAft>
                 <a:spcPts val="800"/>
               </a:spcAft>
@@ -8373,7 +8083,7 @@
                 <a:ea typeface="Calibri" pitchFamily="34" charset="-122"/>
                 <a:cs typeface="Calibri" pitchFamily="34" charset="-120"/>
               </a:rPr>
-              <a:t>Generic multi-agent demo without domain engine</a:t>
+              <a:t>Multi-agent demo with no domain logic behind it</a:t>
             </a:r>
             <a:endParaRPr lang="en-US" sz="1300" dirty="0"/>
           </a:p>
@@ -8398,13 +8108,6 @@
           </a:solidFill>
           <a:ln/>
         </p:spPr>
-        <p:txBody>
-          <a:bodyPr/>
-          <a:lstStyle/>
-          <a:p>
-            <a:endParaRPr lang="en-US"/>
-          </a:p>
-        </p:txBody>
       </p:sp>
       <p:sp>
         <p:nvSpPr>
@@ -8427,7 +8130,7 @@
           <a:bodyPr wrap="square" lIns="0" tIns="0" rIns="0" bIns="0" rtlCol="0" anchor="ctr"/>
           <a:lstStyle/>
           <a:p>
-            <a:pPr marL="0" indent="0">
+            <a:pPr indent="0" marL="0">
               <a:buNone/>
             </a:pPr>
             <a:r>
@@ -8439,7 +8142,7 @@
                 <a:ea typeface="Arial" pitchFamily="34" charset="-122"/>
                 <a:cs typeface="Arial" pitchFamily="34" charset="-120"/>
               </a:rPr>
-              <a:t>RELAY choice</a:t>
+              <a:t>What we built</a:t>
             </a:r>
             <a:endParaRPr lang="en-US" sz="1400" dirty="0"/>
           </a:p>
@@ -8487,7 +8190,7 @@
             <a:endParaRPr lang="en-US" sz="1300" dirty="0"/>
           </a:p>
           <a:p>
-            <a:pPr marL="0" indent="0">
+            <a:pPr indent="0" marL="0">
               <a:spcAft>
                 <a:spcPts val="800"/>
               </a:spcAft>
@@ -8507,7 +8210,7 @@
             <a:endParaRPr lang="en-US" sz="1300" dirty="0"/>
           </a:p>
           <a:p>
-            <a:pPr marL="0" indent="0">
+            <a:pPr indent="0" marL="0">
               <a:spcAft>
                 <a:spcPts val="800"/>
               </a:spcAft>
@@ -8527,7 +8230,7 @@
             <a:endParaRPr lang="en-US" sz="1300" dirty="0"/>
           </a:p>
           <a:p>
-            <a:pPr marL="0" indent="0">
+            <a:pPr indent="0" marL="0">
               <a:spcAft>
                 <a:spcPts val="800"/>
               </a:spcAft>
@@ -8569,7 +8272,7 @@
           <a:bodyPr wrap="square" lIns="0" tIns="0" rIns="0" bIns="0" rtlCol="0" anchor="ctr"/>
           <a:lstStyle/>
           <a:p>
-            <a:pPr marL="0" indent="0">
+            <a:pPr indent="0" marL="0">
               <a:buNone/>
             </a:pPr>
             <a:r>
@@ -8608,7 +8311,7 @@
           <a:bodyPr wrap="square" lIns="0" tIns="0" rIns="0" bIns="0" rtlCol="0" anchor="ctr"/>
           <a:lstStyle/>
           <a:p>
-            <a:pPr marL="0" indent="0" algn="r">
+            <a:pPr algn="r" indent="0" marL="0">
               <a:buNone/>
             </a:pPr>
             <a:r>
@@ -8670,13 +8373,6 @@
           </a:solidFill>
           <a:ln/>
         </p:spPr>
-        <p:txBody>
-          <a:bodyPr/>
-          <a:lstStyle/>
-          <a:p>
-            <a:endParaRPr lang="en-US"/>
-          </a:p>
-        </p:txBody>
       </p:sp>
       <p:sp>
         <p:nvSpPr>
@@ -8699,7 +8395,7 @@
           <a:bodyPr wrap="square" lIns="0" tIns="0" rIns="0" bIns="0" rtlCol="0" anchor="t"/>
           <a:lstStyle/>
           <a:p>
-            <a:pPr marL="0" indent="0">
+            <a:pPr indent="0" marL="0">
               <a:buNone/>
             </a:pPr>
             <a:r>
@@ -8711,7 +8407,7 @@
                 <a:ea typeface="Arial" pitchFamily="34" charset="-122"/>
                 <a:cs typeface="Arial" pitchFamily="34" charset="-120"/>
               </a:rPr>
-              <a:t>RELAY closes the loop with six agents, deterministic scoring, and approval tokens</a:t>
+              <a:t>Six agents, one incident loop — scoring is deterministic, moves need approval</a:t>
             </a:r>
             <a:endParaRPr lang="en-US" sz="1800" dirty="0"/>
           </a:p>
@@ -8736,13 +8432,6 @@
           </a:solidFill>
           <a:ln/>
         </p:spPr>
-        <p:txBody>
-          <a:bodyPr/>
-          <a:lstStyle/>
-          <a:p>
-            <a:endParaRPr lang="en-US"/>
-          </a:p>
-        </p:txBody>
       </p:sp>
       <p:sp>
         <p:nvSpPr>
@@ -8765,7 +8454,7 @@
           <a:bodyPr wrap="square" lIns="0" tIns="0" rIns="0" bIns="0" rtlCol="0" anchor="ctr"/>
           <a:lstStyle/>
           <a:p>
-            <a:pPr marL="0" indent="0" algn="ctr">
+            <a:pPr algn="ctr" indent="0" marL="0">
               <a:buNone/>
             </a:pPr>
             <a:r>
@@ -8804,7 +8493,7 @@
           <a:bodyPr wrap="square" lIns="0" tIns="0" rIns="0" bIns="0" rtlCol="0" anchor="ctr"/>
           <a:lstStyle/>
           <a:p>
-            <a:pPr marL="0" indent="0" algn="ctr">
+            <a:pPr algn="ctr" indent="0" marL="0">
               <a:buNone/>
             </a:pPr>
             <a:r>
@@ -8843,7 +8532,7 @@
           <a:bodyPr wrap="square" lIns="0" tIns="0" rIns="0" bIns="0" rtlCol="0" anchor="ctr"/>
           <a:lstStyle/>
           <a:p>
-            <a:pPr marL="0" indent="0" algn="ctr">
+            <a:pPr algn="ctr" indent="0" marL="0">
               <a:buNone/>
             </a:pPr>
             <a:r>
@@ -8880,13 +8569,6 @@
           </a:solidFill>
           <a:ln/>
         </p:spPr>
-        <p:txBody>
-          <a:bodyPr/>
-          <a:lstStyle/>
-          <a:p>
-            <a:endParaRPr lang="en-US"/>
-          </a:p>
-        </p:txBody>
       </p:sp>
       <p:sp>
         <p:nvSpPr>
@@ -8909,7 +8591,7 @@
           <a:bodyPr wrap="square" lIns="0" tIns="0" rIns="0" bIns="0" rtlCol="0" anchor="ctr"/>
           <a:lstStyle/>
           <a:p>
-            <a:pPr marL="0" indent="0" algn="ctr">
+            <a:pPr algn="ctr" indent="0" marL="0">
               <a:buNone/>
             </a:pPr>
             <a:r>
@@ -8948,7 +8630,7 @@
           <a:bodyPr wrap="square" lIns="0" tIns="0" rIns="0" bIns="0" rtlCol="0" anchor="ctr"/>
           <a:lstStyle/>
           <a:p>
-            <a:pPr marL="0" indent="0" algn="ctr">
+            <a:pPr algn="ctr" indent="0" marL="0">
               <a:buNone/>
             </a:pPr>
             <a:r>
@@ -8987,7 +8669,7 @@
           <a:bodyPr wrap="square" lIns="0" tIns="0" rIns="0" bIns="0" rtlCol="0" anchor="ctr"/>
           <a:lstStyle/>
           <a:p>
-            <a:pPr marL="0" indent="0" algn="ctr">
+            <a:pPr algn="ctr" indent="0" marL="0">
               <a:buNone/>
             </a:pPr>
             <a:r>
@@ -9024,13 +8706,6 @@
           </a:solidFill>
           <a:ln/>
         </p:spPr>
-        <p:txBody>
-          <a:bodyPr/>
-          <a:lstStyle/>
-          <a:p>
-            <a:endParaRPr lang="en-US"/>
-          </a:p>
-        </p:txBody>
       </p:sp>
       <p:sp>
         <p:nvSpPr>
@@ -9053,7 +8728,7 @@
           <a:bodyPr wrap="square" lIns="0" tIns="0" rIns="0" bIns="0" rtlCol="0" anchor="ctr"/>
           <a:lstStyle/>
           <a:p>
-            <a:pPr marL="0" indent="0" algn="ctr">
+            <a:pPr algn="ctr" indent="0" marL="0">
               <a:buNone/>
             </a:pPr>
             <a:r>
@@ -9092,7 +8767,7 @@
           <a:bodyPr wrap="square" lIns="0" tIns="0" rIns="0" bIns="0" rtlCol="0" anchor="ctr"/>
           <a:lstStyle/>
           <a:p>
-            <a:pPr marL="0" indent="0" algn="ctr">
+            <a:pPr algn="ctr" indent="0" marL="0">
               <a:buNone/>
             </a:pPr>
             <a:r>
@@ -9131,7 +8806,7 @@
           <a:bodyPr wrap="square" lIns="0" tIns="0" rIns="0" bIns="0" rtlCol="0" anchor="ctr"/>
           <a:lstStyle/>
           <a:p>
-            <a:pPr marL="0" indent="0" algn="ctr">
+            <a:pPr algn="ctr" indent="0" marL="0">
               <a:buNone/>
             </a:pPr>
             <a:r>
@@ -9168,13 +8843,6 @@
           </a:solidFill>
           <a:ln/>
         </p:spPr>
-        <p:txBody>
-          <a:bodyPr/>
-          <a:lstStyle/>
-          <a:p>
-            <a:endParaRPr lang="en-US"/>
-          </a:p>
-        </p:txBody>
       </p:sp>
       <p:sp>
         <p:nvSpPr>
@@ -9197,7 +8865,7 @@
           <a:bodyPr wrap="square" lIns="0" tIns="0" rIns="0" bIns="0" rtlCol="0" anchor="ctr"/>
           <a:lstStyle/>
           <a:p>
-            <a:pPr marL="0" indent="0" algn="ctr">
+            <a:pPr algn="ctr" indent="0" marL="0">
               <a:buNone/>
             </a:pPr>
             <a:r>
@@ -9236,7 +8904,7 @@
           <a:bodyPr wrap="square" lIns="0" tIns="0" rIns="0" bIns="0" rtlCol="0" anchor="ctr"/>
           <a:lstStyle/>
           <a:p>
-            <a:pPr marL="0" indent="0" algn="ctr">
+            <a:pPr algn="ctr" indent="0" marL="0">
               <a:buNone/>
             </a:pPr>
             <a:r>
@@ -9275,7 +8943,7 @@
           <a:bodyPr wrap="square" lIns="0" tIns="0" rIns="0" bIns="0" rtlCol="0" anchor="ctr"/>
           <a:lstStyle/>
           <a:p>
-            <a:pPr marL="0" indent="0" algn="ctr">
+            <a:pPr algn="ctr" indent="0" marL="0">
               <a:buNone/>
             </a:pPr>
             <a:r>
@@ -9312,13 +8980,6 @@
           </a:solidFill>
           <a:ln/>
         </p:spPr>
-        <p:txBody>
-          <a:bodyPr/>
-          <a:lstStyle/>
-          <a:p>
-            <a:endParaRPr lang="en-US"/>
-          </a:p>
-        </p:txBody>
       </p:sp>
       <p:sp>
         <p:nvSpPr>
@@ -9341,7 +9002,7 @@
           <a:bodyPr wrap="square" lIns="0" tIns="0" rIns="0" bIns="0" rtlCol="0" anchor="ctr"/>
           <a:lstStyle/>
           <a:p>
-            <a:pPr marL="0" indent="0" algn="ctr">
+            <a:pPr algn="ctr" indent="0" marL="0">
               <a:buNone/>
             </a:pPr>
             <a:r>
@@ -9380,7 +9041,7 @@
           <a:bodyPr wrap="square" lIns="0" tIns="0" rIns="0" bIns="0" rtlCol="0" anchor="ctr"/>
           <a:lstStyle/>
           <a:p>
-            <a:pPr marL="0" indent="0" algn="ctr">
+            <a:pPr algn="ctr" indent="0" marL="0">
               <a:buNone/>
             </a:pPr>
             <a:r>
@@ -9419,7 +9080,7 @@
           <a:bodyPr wrap="square" lIns="0" tIns="0" rIns="0" bIns="0" rtlCol="0" anchor="ctr"/>
           <a:lstStyle/>
           <a:p>
-            <a:pPr marL="0" indent="0" algn="ctr">
+            <a:pPr algn="ctr" indent="0" marL="0">
               <a:buNone/>
             </a:pPr>
             <a:r>
@@ -9456,13 +9117,6 @@
           </a:solidFill>
           <a:ln/>
         </p:spPr>
-        <p:txBody>
-          <a:bodyPr/>
-          <a:lstStyle/>
-          <a:p>
-            <a:endParaRPr lang="en-US"/>
-          </a:p>
-        </p:txBody>
       </p:sp>
       <p:sp>
         <p:nvSpPr>
@@ -9485,7 +9139,7 @@
           <a:bodyPr wrap="square" lIns="0" tIns="0" rIns="0" bIns="0" rtlCol="0" anchor="ctr"/>
           <a:lstStyle/>
           <a:p>
-            <a:pPr marL="0" indent="0" algn="ctr">
+            <a:pPr algn="ctr" indent="0" marL="0">
               <a:buNone/>
             </a:pPr>
             <a:r>
@@ -9524,7 +9178,7 @@
           <a:bodyPr wrap="square" lIns="0" tIns="0" rIns="0" bIns="0" rtlCol="0" anchor="ctr"/>
           <a:lstStyle/>
           <a:p>
-            <a:pPr marL="0" indent="0" algn="ctr">
+            <a:pPr algn="ctr" indent="0" marL="0">
               <a:buNone/>
             </a:pPr>
             <a:r>
@@ -9563,7 +9217,7 @@
           <a:bodyPr wrap="square" lIns="0" tIns="0" rIns="0" bIns="0" rtlCol="0" anchor="ctr"/>
           <a:lstStyle/>
           <a:p>
-            <a:pPr marL="0" indent="0" algn="ctr">
+            <a:pPr algn="ctr" indent="0" marL="0">
               <a:buNone/>
             </a:pPr>
             <a:r>
@@ -9600,13 +9254,6 @@
           </a:solidFill>
           <a:ln/>
         </p:spPr>
-        <p:txBody>
-          <a:bodyPr/>
-          <a:lstStyle/>
-          <a:p>
-            <a:endParaRPr lang="en-US"/>
-          </a:p>
-        </p:txBody>
       </p:sp>
       <p:sp>
         <p:nvSpPr>
@@ -9629,7 +9276,7 @@
           <a:bodyPr wrap="square" lIns="0" tIns="0" rIns="0" bIns="0" rtlCol="0" anchor="ctr"/>
           <a:lstStyle/>
           <a:p>
-            <a:pPr marL="0" indent="0">
+            <a:pPr indent="0" marL="0">
               <a:buNone/>
             </a:pPr>
             <a:r>
@@ -9668,7 +9315,7 @@
           <a:bodyPr wrap="square" lIns="0" tIns="0" rIns="0" bIns="0" rtlCol="0" anchor="ctr"/>
           <a:lstStyle/>
           <a:p>
-            <a:pPr marL="0" indent="0">
+            <a:pPr indent="0" marL="0">
               <a:buNone/>
             </a:pPr>
             <a:r>
@@ -9705,13 +9352,6 @@
           </a:solidFill>
           <a:ln/>
         </p:spPr>
-        <p:txBody>
-          <a:bodyPr/>
-          <a:lstStyle/>
-          <a:p>
-            <a:endParaRPr lang="en-US"/>
-          </a:p>
-        </p:txBody>
       </p:sp>
       <p:sp>
         <p:nvSpPr>
@@ -9734,7 +9374,7 @@
           <a:bodyPr wrap="square" lIns="0" tIns="0" rIns="0" bIns="0" rtlCol="0" anchor="ctr"/>
           <a:lstStyle/>
           <a:p>
-            <a:pPr marL="0" indent="0">
+            <a:pPr indent="0" marL="0">
               <a:buNone/>
             </a:pPr>
             <a:r>
@@ -9773,7 +9413,7 @@
           <a:bodyPr wrap="square" lIns="0" tIns="0" rIns="0" bIns="0" rtlCol="0" anchor="ctr"/>
           <a:lstStyle/>
           <a:p>
-            <a:pPr marL="0" indent="0">
+            <a:pPr indent="0" marL="0">
               <a:buNone/>
             </a:pPr>
             <a:r>
@@ -9810,13 +9450,6 @@
           </a:solidFill>
           <a:ln/>
         </p:spPr>
-        <p:txBody>
-          <a:bodyPr/>
-          <a:lstStyle/>
-          <a:p>
-            <a:endParaRPr lang="en-US"/>
-          </a:p>
-        </p:txBody>
       </p:sp>
       <p:sp>
         <p:nvSpPr>
@@ -9839,7 +9472,7 @@
           <a:bodyPr wrap="square" lIns="0" tIns="0" rIns="0" bIns="0" rtlCol="0" anchor="ctr"/>
           <a:lstStyle/>
           <a:p>
-            <a:pPr marL="0" indent="0">
+            <a:pPr indent="0" marL="0">
               <a:buNone/>
             </a:pPr>
             <a:r>
@@ -9878,7 +9511,7 @@
           <a:bodyPr wrap="square" lIns="0" tIns="0" rIns="0" bIns="0" rtlCol="0" anchor="ctr"/>
           <a:lstStyle/>
           <a:p>
-            <a:pPr marL="0" indent="0">
+            <a:pPr indent="0" marL="0">
               <a:buNone/>
             </a:pPr>
             <a:r>
@@ -9917,7 +9550,7 @@
           <a:bodyPr wrap="square" lIns="0" tIns="0" rIns="0" bIns="0" rtlCol="0" anchor="ctr"/>
           <a:lstStyle/>
           <a:p>
-            <a:pPr marL="0" indent="0">
+            <a:pPr indent="0" marL="0">
               <a:buNone/>
             </a:pPr>
             <a:r>
@@ -9956,7 +9589,7 @@
           <a:bodyPr wrap="square" lIns="0" tIns="0" rIns="0" bIns="0" rtlCol="0" anchor="ctr"/>
           <a:lstStyle/>
           <a:p>
-            <a:pPr marL="0" indent="0" algn="r">
+            <a:pPr algn="r" indent="0" marL="0">
               <a:buNone/>
             </a:pPr>
             <a:r>
@@ -10018,13 +9651,6 @@
           </a:solidFill>
           <a:ln/>
         </p:spPr>
-        <p:txBody>
-          <a:bodyPr/>
-          <a:lstStyle/>
-          <a:p>
-            <a:endParaRPr lang="en-US"/>
-          </a:p>
-        </p:txBody>
       </p:sp>
       <p:sp>
         <p:nvSpPr>
@@ -10047,7 +9673,7 @@
           <a:bodyPr wrap="square" lIns="0" tIns="0" rIns="0" bIns="0" rtlCol="0" anchor="t"/>
           <a:lstStyle/>
           <a:p>
-            <a:pPr marL="0" indent="0">
+            <a:pPr indent="0" marL="0">
               <a:buNone/>
             </a:pPr>
             <a:r>
@@ -10059,7 +9685,7 @@
                 <a:ea typeface="Arial" pitchFamily="34" charset="-122"/>
                 <a:cs typeface="Arial" pitchFamily="34" charset="-120"/>
               </a:rPr>
-              <a:t>Architecture separates domain truth from agent orchestration — team-designed, not platform magic</a:t>
+              <a:t>We split the maths (risk engine) from the workflow (orchestrator + agents)</a:t>
             </a:r>
             <a:endParaRPr lang="en-US" sz="1800" dirty="0"/>
           </a:p>
@@ -10084,13 +9710,6 @@
           </a:solidFill>
           <a:ln/>
         </p:spPr>
-        <p:txBody>
-          <a:bodyPr/>
-          <a:lstStyle/>
-          <a:p>
-            <a:endParaRPr lang="en-US"/>
-          </a:p>
-        </p:txBody>
       </p:sp>
       <p:sp>
         <p:nvSpPr>
@@ -10113,7 +9732,7 @@
           <a:bodyPr wrap="square" lIns="0" tIns="0" rIns="0" bIns="0" rtlCol="0" anchor="ctr"/>
           <a:lstStyle/>
           <a:p>
-            <a:pPr marL="0" indent="0">
+            <a:pPr indent="0" marL="0">
               <a:buNone/>
             </a:pPr>
             <a:r>
@@ -10150,13 +9769,6 @@
           </a:solidFill>
           <a:ln/>
         </p:spPr>
-        <p:txBody>
-          <a:bodyPr/>
-          <a:lstStyle/>
-          <a:p>
-            <a:endParaRPr lang="en-US"/>
-          </a:p>
-        </p:txBody>
       </p:sp>
       <p:sp>
         <p:nvSpPr>
@@ -10179,7 +9791,7 @@
           <a:bodyPr wrap="square" lIns="0" tIns="0" rIns="0" bIns="0" rtlCol="0" anchor="ctr"/>
           <a:lstStyle/>
           <a:p>
-            <a:pPr marL="0" indent="0">
+            <a:pPr indent="0" marL="0">
               <a:buNone/>
             </a:pPr>
             <a:r>
@@ -10216,13 +9828,6 @@
           </a:solidFill>
           <a:ln/>
         </p:spPr>
-        <p:txBody>
-          <a:bodyPr/>
-          <a:lstStyle/>
-          <a:p>
-            <a:endParaRPr lang="en-US"/>
-          </a:p>
-        </p:txBody>
       </p:sp>
       <p:sp>
         <p:nvSpPr>
@@ -10245,7 +9850,7 @@
           <a:bodyPr wrap="square" lIns="0" tIns="0" rIns="0" bIns="0" rtlCol="0" anchor="ctr"/>
           <a:lstStyle/>
           <a:p>
-            <a:pPr marL="0" indent="0">
+            <a:pPr indent="0" marL="0">
               <a:buNone/>
             </a:pPr>
             <a:r>
@@ -10282,13 +9887,6 @@
           </a:solidFill>
           <a:ln/>
         </p:spPr>
-        <p:txBody>
-          <a:bodyPr/>
-          <a:lstStyle/>
-          <a:p>
-            <a:endParaRPr lang="en-US"/>
-          </a:p>
-        </p:txBody>
       </p:sp>
       <p:sp>
         <p:nvSpPr>
@@ -10311,7 +9909,7 @@
           <a:bodyPr wrap="square" lIns="0" tIns="0" rIns="0" bIns="0" rtlCol="0" anchor="ctr"/>
           <a:lstStyle/>
           <a:p>
-            <a:pPr marL="0" indent="0">
+            <a:pPr indent="0" marL="0">
               <a:buNone/>
             </a:pPr>
             <a:r>
@@ -10348,13 +9946,6 @@
           </a:solidFill>
           <a:ln/>
         </p:spPr>
-        <p:txBody>
-          <a:bodyPr/>
-          <a:lstStyle/>
-          <a:p>
-            <a:endParaRPr lang="en-US"/>
-          </a:p>
-        </p:txBody>
       </p:sp>
       <p:sp>
         <p:nvSpPr>
@@ -10377,7 +9968,7 @@
           <a:bodyPr wrap="square" lIns="0" tIns="0" rIns="0" bIns="0" rtlCol="0" anchor="ctr"/>
           <a:lstStyle/>
           <a:p>
-            <a:pPr marL="0" indent="0">
+            <a:pPr indent="0" marL="0">
               <a:buNone/>
             </a:pPr>
             <a:r>
@@ -10414,13 +10005,6 @@
           </a:solidFill>
           <a:ln/>
         </p:spPr>
-        <p:txBody>
-          <a:bodyPr/>
-          <a:lstStyle/>
-          <a:p>
-            <a:endParaRPr lang="en-US"/>
-          </a:p>
-        </p:txBody>
       </p:sp>
       <p:sp>
         <p:nvSpPr>
@@ -10443,7 +10027,7 @@
           <a:bodyPr wrap="square" lIns="0" tIns="0" rIns="0" bIns="0" rtlCol="0" anchor="ctr"/>
           <a:lstStyle/>
           <a:p>
-            <a:pPr marL="0" indent="0">
+            <a:pPr indent="0" marL="0">
               <a:buNone/>
             </a:pPr>
             <a:r>
@@ -10480,13 +10064,6 @@
           </a:solidFill>
           <a:ln/>
         </p:spPr>
-        <p:txBody>
-          <a:bodyPr/>
-          <a:lstStyle/>
-          <a:p>
-            <a:endParaRPr lang="en-US"/>
-          </a:p>
-        </p:txBody>
       </p:sp>
       <p:sp>
         <p:nvSpPr>
@@ -10509,7 +10086,7 @@
           <a:bodyPr wrap="square" lIns="0" tIns="0" rIns="0" bIns="0" rtlCol="0" anchor="ctr"/>
           <a:lstStyle/>
           <a:p>
-            <a:pPr marL="0" indent="0">
+            <a:pPr indent="0" marL="0">
               <a:buNone/>
             </a:pPr>
             <a:r>
@@ -10546,13 +10123,6 @@
           </a:solidFill>
           <a:ln/>
         </p:spPr>
-        <p:txBody>
-          <a:bodyPr/>
-          <a:lstStyle/>
-          <a:p>
-            <a:endParaRPr lang="en-US"/>
-          </a:p>
-        </p:txBody>
       </p:sp>
       <p:sp>
         <p:nvSpPr>
@@ -10575,7 +10145,7 @@
           <a:bodyPr wrap="square" lIns="0" tIns="0" rIns="0" bIns="0" rtlCol="0" anchor="ctr"/>
           <a:lstStyle/>
           <a:p>
-            <a:pPr marL="0" indent="0">
+            <a:pPr indent="0" marL="0">
               <a:buNone/>
             </a:pPr>
             <a:r>
@@ -10587,7 +10157,7 @@
                 <a:ea typeface="Calibri" pitchFamily="34" charset="-122"/>
                 <a:cs typeface="Calibri" pitchFamily="34" charset="-120"/>
               </a:rPr>
-              <a:t>Synthetic Tuas-style terminal APIs (team-built sample data — PSA provides no dataset this year). Same contracts for PORTNET/CITOS-class integration in Sprinternship; aligns with MPA Maritime Digital Twin scenario layer</a:t>
+              <a:t>Synthetic Tuas-style APIs we wrote — PSA provided no dataset this round. Same tool shapes we would wire to PORTNET/CITOS in a sprinternship</a:t>
             </a:r>
             <a:endParaRPr lang="en-US" sz="1200" dirty="0"/>
           </a:p>
@@ -10614,7 +10184,7 @@
           <a:bodyPr wrap="square" lIns="0" tIns="0" rIns="0" bIns="0" rtlCol="0" anchor="ctr"/>
           <a:lstStyle/>
           <a:p>
-            <a:pPr marL="0" indent="0">
+            <a:pPr indent="0" marL="0">
               <a:buNone/>
             </a:pPr>
             <a:r>
@@ -10653,7 +10223,7 @@
           <a:bodyPr wrap="square" lIns="0" tIns="0" rIns="0" bIns="0" rtlCol="0" anchor="ctr"/>
           <a:lstStyle/>
           <a:p>
-            <a:pPr marL="0" indent="0" algn="r">
+            <a:pPr algn="r" indent="0" marL="0">
               <a:buNone/>
             </a:pPr>
             <a:r>
@@ -10715,13 +10285,6 @@
           </a:solidFill>
           <a:ln/>
         </p:spPr>
-        <p:txBody>
-          <a:bodyPr/>
-          <a:lstStyle/>
-          <a:p>
-            <a:endParaRPr lang="en-US"/>
-          </a:p>
-        </p:txBody>
       </p:sp>
       <p:sp>
         <p:nvSpPr>
@@ -10744,7 +10307,7 @@
           <a:bodyPr wrap="square" lIns="0" tIns="0" rIns="0" bIns="0" rtlCol="0" anchor="t"/>
           <a:lstStyle/>
           <a:p>
-            <a:pPr marL="0" indent="0">
+            <a:pPr indent="0" marL="0">
               <a:buNone/>
             </a:pPr>
             <a:r>
@@ -10756,7 +10319,7 @@
                 <a:ea typeface="Arial" pitchFamily="34" charset="-122"/>
                 <a:cs typeface="Arial" pitchFamily="34" charset="-120"/>
               </a:rPr>
-              <a:t>On the demo twin, approved plans cut expected connection loss within one audited cycle</a:t>
+              <a:t>Demo results on our synthetic twin — one approval cycle per scenario</a:t>
             </a:r>
             <a:endParaRPr lang="en-US" sz="1800" dirty="0"/>
           </a:p>
@@ -10781,13 +10344,6 @@
           </a:solidFill>
           <a:ln/>
         </p:spPr>
-        <p:txBody>
-          <a:bodyPr/>
-          <a:lstStyle/>
-          <a:p>
-            <a:endParaRPr lang="en-US"/>
-          </a:p>
-        </p:txBody>
       </p:sp>
       <p:sp>
         <p:nvSpPr>
@@ -10810,7 +10366,7 @@
           <a:bodyPr wrap="square" lIns="0" tIns="0" rIns="0" bIns="0" rtlCol="0" anchor="ctr"/>
           <a:lstStyle/>
           <a:p>
-            <a:pPr marL="0" indent="0" algn="ctr">
+            <a:pPr algn="ctr" indent="0" marL="0">
               <a:buNone/>
             </a:pPr>
             <a:r>
@@ -10847,13 +10403,6 @@
           </a:solidFill>
           <a:ln/>
         </p:spPr>
-        <p:txBody>
-          <a:bodyPr/>
-          <a:lstStyle/>
-          <a:p>
-            <a:endParaRPr lang="en-US"/>
-          </a:p>
-        </p:txBody>
       </p:sp>
       <p:sp>
         <p:nvSpPr>
@@ -10876,7 +10425,7 @@
           <a:bodyPr wrap="square" lIns="0" tIns="0" rIns="0" bIns="0" rtlCol="0" anchor="ctr"/>
           <a:lstStyle/>
           <a:p>
-            <a:pPr marL="0" indent="0" algn="ctr">
+            <a:pPr algn="ctr" indent="0" marL="0">
               <a:buNone/>
             </a:pPr>
             <a:r>
@@ -10913,13 +10462,6 @@
           </a:solidFill>
           <a:ln/>
         </p:spPr>
-        <p:txBody>
-          <a:bodyPr/>
-          <a:lstStyle/>
-          <a:p>
-            <a:endParaRPr lang="en-US"/>
-          </a:p>
-        </p:txBody>
       </p:sp>
       <p:sp>
         <p:nvSpPr>
@@ -10942,7 +10484,7 @@
           <a:bodyPr wrap="square" lIns="0" tIns="0" rIns="0" bIns="0" rtlCol="0" anchor="ctr"/>
           <a:lstStyle/>
           <a:p>
-            <a:pPr marL="0" indent="0" algn="ctr">
+            <a:pPr algn="ctr" indent="0" marL="0">
               <a:buNone/>
             </a:pPr>
             <a:r>
@@ -10979,13 +10521,6 @@
           </a:solidFill>
           <a:ln/>
         </p:spPr>
-        <p:txBody>
-          <a:bodyPr/>
-          <a:lstStyle/>
-          <a:p>
-            <a:endParaRPr lang="en-US"/>
-          </a:p>
-        </p:txBody>
       </p:sp>
       <p:sp>
         <p:nvSpPr>
@@ -11008,7 +10543,7 @@
           <a:bodyPr wrap="square" lIns="0" tIns="0" rIns="0" bIns="0" rtlCol="0" anchor="ctr"/>
           <a:lstStyle/>
           <a:p>
-            <a:pPr marL="0" indent="0" algn="ctr">
+            <a:pPr algn="ctr" indent="0" marL="0">
               <a:buNone/>
             </a:pPr>
             <a:r>
@@ -11045,13 +10580,6 @@
           </a:solidFill>
           <a:ln/>
         </p:spPr>
-        <p:txBody>
-          <a:bodyPr/>
-          <a:lstStyle/>
-          <a:p>
-            <a:endParaRPr lang="en-US"/>
-          </a:p>
-        </p:txBody>
       </p:sp>
       <p:sp>
         <p:nvSpPr>
@@ -11074,7 +10602,7 @@
           <a:bodyPr wrap="square" lIns="0" tIns="0" rIns="0" bIns="0" rtlCol="0" anchor="ctr"/>
           <a:lstStyle/>
           <a:p>
-            <a:pPr marL="0" indent="0" algn="ctr">
+            <a:pPr algn="ctr" indent="0" marL="0">
               <a:buNone/>
             </a:pPr>
             <a:r>
@@ -11111,13 +10639,6 @@
           </a:solidFill>
           <a:ln/>
         </p:spPr>
-        <p:txBody>
-          <a:bodyPr/>
-          <a:lstStyle/>
-          <a:p>
-            <a:endParaRPr lang="en-US"/>
-          </a:p>
-        </p:txBody>
       </p:sp>
       <p:sp>
         <p:nvSpPr>
@@ -11140,7 +10661,7 @@
           <a:bodyPr wrap="square" lIns="0" tIns="0" rIns="0" bIns="0" rtlCol="0" anchor="ctr"/>
           <a:lstStyle/>
           <a:p>
-            <a:pPr marL="0" indent="0" algn="ctr">
+            <a:pPr algn="ctr" indent="0" marL="0">
               <a:buNone/>
             </a:pPr>
             <a:r>
@@ -11177,13 +10698,6 @@
           </a:solidFill>
           <a:ln/>
         </p:spPr>
-        <p:txBody>
-          <a:bodyPr/>
-          <a:lstStyle/>
-          <a:p>
-            <a:endParaRPr lang="en-US"/>
-          </a:p>
-        </p:txBody>
       </p:sp>
       <p:sp>
         <p:nvSpPr>
@@ -11206,7 +10720,7 @@
           <a:bodyPr wrap="square" lIns="0" tIns="0" rIns="0" bIns="0" rtlCol="0" anchor="ctr"/>
           <a:lstStyle/>
           <a:p>
-            <a:pPr marL="0" indent="0" algn="l">
+            <a:pPr algn="l" indent="0" marL="0">
               <a:buNone/>
             </a:pPr>
             <a:r>
@@ -11243,13 +10757,6 @@
           </a:solidFill>
           <a:ln/>
         </p:spPr>
-        <p:txBody>
-          <a:bodyPr/>
-          <a:lstStyle/>
-          <a:p>
-            <a:endParaRPr lang="en-US"/>
-          </a:p>
-        </p:txBody>
       </p:sp>
       <p:sp>
         <p:nvSpPr>
@@ -11272,7 +10779,7 @@
           <a:bodyPr wrap="square" lIns="0" tIns="0" rIns="0" bIns="0" rtlCol="0" anchor="ctr"/>
           <a:lstStyle/>
           <a:p>
-            <a:pPr marL="0" indent="0" algn="ctr">
+            <a:pPr algn="ctr" indent="0" marL="0">
               <a:buNone/>
             </a:pPr>
             <a:r>
@@ -11309,13 +10816,6 @@
           </a:solidFill>
           <a:ln/>
         </p:spPr>
-        <p:txBody>
-          <a:bodyPr/>
-          <a:lstStyle/>
-          <a:p>
-            <a:endParaRPr lang="en-US"/>
-          </a:p>
-        </p:txBody>
       </p:sp>
       <p:sp>
         <p:nvSpPr>
@@ -11338,7 +10838,7 @@
           <a:bodyPr wrap="square" lIns="0" tIns="0" rIns="0" bIns="0" rtlCol="0" anchor="ctr"/>
           <a:lstStyle/>
           <a:p>
-            <a:pPr marL="0" indent="0" algn="ctr">
+            <a:pPr algn="ctr" indent="0" marL="0">
               <a:buNone/>
             </a:pPr>
             <a:r>
@@ -11375,13 +10875,6 @@
           </a:solidFill>
           <a:ln/>
         </p:spPr>
-        <p:txBody>
-          <a:bodyPr/>
-          <a:lstStyle/>
-          <a:p>
-            <a:endParaRPr lang="en-US"/>
-          </a:p>
-        </p:txBody>
       </p:sp>
       <p:sp>
         <p:nvSpPr>
@@ -11404,7 +10897,7 @@
           <a:bodyPr wrap="square" lIns="0" tIns="0" rIns="0" bIns="0" rtlCol="0" anchor="ctr"/>
           <a:lstStyle/>
           <a:p>
-            <a:pPr marL="0" indent="0" algn="ctr">
+            <a:pPr algn="ctr" indent="0" marL="0">
               <a:buNone/>
             </a:pPr>
             <a:r>
@@ -11441,13 +10934,6 @@
           </a:solidFill>
           <a:ln/>
         </p:spPr>
-        <p:txBody>
-          <a:bodyPr/>
-          <a:lstStyle/>
-          <a:p>
-            <a:endParaRPr lang="en-US"/>
-          </a:p>
-        </p:txBody>
       </p:sp>
       <p:sp>
         <p:nvSpPr>
@@ -11470,7 +10956,7 @@
           <a:bodyPr wrap="square" lIns="0" tIns="0" rIns="0" bIns="0" rtlCol="0" anchor="ctr"/>
           <a:lstStyle/>
           <a:p>
-            <a:pPr marL="0" indent="0" algn="ctr">
+            <a:pPr algn="ctr" indent="0" marL="0">
               <a:buNone/>
             </a:pPr>
             <a:r>
@@ -11507,13 +10993,6 @@
           </a:solidFill>
           <a:ln/>
         </p:spPr>
-        <p:txBody>
-          <a:bodyPr/>
-          <a:lstStyle/>
-          <a:p>
-            <a:endParaRPr lang="en-US"/>
-          </a:p>
-        </p:txBody>
       </p:sp>
       <p:sp>
         <p:nvSpPr>
@@ -11536,7 +11015,7 @@
           <a:bodyPr wrap="square" lIns="0" tIns="0" rIns="0" bIns="0" rtlCol="0" anchor="ctr"/>
           <a:lstStyle/>
           <a:p>
-            <a:pPr marL="0" indent="0" algn="ctr">
+            <a:pPr algn="ctr" indent="0" marL="0">
               <a:buNone/>
             </a:pPr>
             <a:r>
@@ -11573,13 +11052,6 @@
           </a:solidFill>
           <a:ln/>
         </p:spPr>
-        <p:txBody>
-          <a:bodyPr/>
-          <a:lstStyle/>
-          <a:p>
-            <a:endParaRPr lang="en-US"/>
-          </a:p>
-        </p:txBody>
       </p:sp>
       <p:sp>
         <p:nvSpPr>
@@ -11602,7 +11074,7 @@
           <a:bodyPr wrap="square" lIns="0" tIns="0" rIns="0" bIns="0" rtlCol="0" anchor="ctr"/>
           <a:lstStyle/>
           <a:p>
-            <a:pPr marL="0" indent="0" algn="l">
+            <a:pPr algn="l" indent="0" marL="0">
               <a:buNone/>
             </a:pPr>
             <a:r>
@@ -11639,13 +11111,6 @@
           </a:solidFill>
           <a:ln/>
         </p:spPr>
-        <p:txBody>
-          <a:bodyPr/>
-          <a:lstStyle/>
-          <a:p>
-            <a:endParaRPr lang="en-US"/>
-          </a:p>
-        </p:txBody>
       </p:sp>
       <p:sp>
         <p:nvSpPr>
@@ -11668,7 +11133,7 @@
           <a:bodyPr wrap="square" lIns="0" tIns="0" rIns="0" bIns="0" rtlCol="0" anchor="ctr"/>
           <a:lstStyle/>
           <a:p>
-            <a:pPr marL="0" indent="0" algn="ctr">
+            <a:pPr algn="ctr" indent="0" marL="0">
               <a:buNone/>
             </a:pPr>
             <a:r>
@@ -11705,13 +11170,6 @@
           </a:solidFill>
           <a:ln/>
         </p:spPr>
-        <p:txBody>
-          <a:bodyPr/>
-          <a:lstStyle/>
-          <a:p>
-            <a:endParaRPr lang="en-US"/>
-          </a:p>
-        </p:txBody>
       </p:sp>
       <p:sp>
         <p:nvSpPr>
@@ -11734,7 +11192,7 @@
           <a:bodyPr wrap="square" lIns="0" tIns="0" rIns="0" bIns="0" rtlCol="0" anchor="ctr"/>
           <a:lstStyle/>
           <a:p>
-            <a:pPr marL="0" indent="0" algn="ctr">
+            <a:pPr algn="ctr" indent="0" marL="0">
               <a:buNone/>
             </a:pPr>
             <a:r>
@@ -11771,13 +11229,6 @@
           </a:solidFill>
           <a:ln/>
         </p:spPr>
-        <p:txBody>
-          <a:bodyPr/>
-          <a:lstStyle/>
-          <a:p>
-            <a:endParaRPr lang="en-US"/>
-          </a:p>
-        </p:txBody>
       </p:sp>
       <p:sp>
         <p:nvSpPr>
@@ -11800,7 +11251,7 @@
           <a:bodyPr wrap="square" lIns="0" tIns="0" rIns="0" bIns="0" rtlCol="0" anchor="ctr"/>
           <a:lstStyle/>
           <a:p>
-            <a:pPr marL="0" indent="0" algn="ctr">
+            <a:pPr algn="ctr" indent="0" marL="0">
               <a:buNone/>
             </a:pPr>
             <a:r>
@@ -11837,13 +11288,6 @@
           </a:solidFill>
           <a:ln/>
         </p:spPr>
-        <p:txBody>
-          <a:bodyPr/>
-          <a:lstStyle/>
-          <a:p>
-            <a:endParaRPr lang="en-US"/>
-          </a:p>
-        </p:txBody>
       </p:sp>
       <p:sp>
         <p:nvSpPr>
@@ -11866,7 +11310,7 @@
           <a:bodyPr wrap="square" lIns="0" tIns="0" rIns="0" bIns="0" rtlCol="0" anchor="ctr"/>
           <a:lstStyle/>
           <a:p>
-            <a:pPr marL="0" indent="0" algn="ctr">
+            <a:pPr algn="ctr" indent="0" marL="0">
               <a:buNone/>
             </a:pPr>
             <a:r>
@@ -11903,13 +11347,6 @@
           </a:solidFill>
           <a:ln/>
         </p:spPr>
-        <p:txBody>
-          <a:bodyPr/>
-          <a:lstStyle/>
-          <a:p>
-            <a:endParaRPr lang="en-US"/>
-          </a:p>
-        </p:txBody>
       </p:sp>
       <p:sp>
         <p:nvSpPr>
@@ -11932,7 +11369,7 @@
           <a:bodyPr wrap="square" lIns="0" tIns="0" rIns="0" bIns="0" rtlCol="0" anchor="ctr"/>
           <a:lstStyle/>
           <a:p>
-            <a:pPr marL="0" indent="0" algn="ctr">
+            <a:pPr algn="ctr" indent="0" marL="0">
               <a:buNone/>
             </a:pPr>
             <a:r>
@@ -11969,13 +11406,6 @@
           </a:solidFill>
           <a:ln/>
         </p:spPr>
-        <p:txBody>
-          <a:bodyPr/>
-          <a:lstStyle/>
-          <a:p>
-            <a:endParaRPr lang="en-US"/>
-          </a:p>
-        </p:txBody>
       </p:sp>
       <p:sp>
         <p:nvSpPr>
@@ -11998,7 +11428,7 @@
           <a:bodyPr wrap="square" lIns="0" tIns="0" rIns="0" bIns="0" rtlCol="0" anchor="ctr"/>
           <a:lstStyle/>
           <a:p>
-            <a:pPr marL="0" indent="0" algn="l">
+            <a:pPr algn="l" indent="0" marL="0">
               <a:buNone/>
             </a:pPr>
             <a:r>
@@ -12035,13 +11465,6 @@
           </a:solidFill>
           <a:ln/>
         </p:spPr>
-        <p:txBody>
-          <a:bodyPr/>
-          <a:lstStyle/>
-          <a:p>
-            <a:endParaRPr lang="en-US"/>
-          </a:p>
-        </p:txBody>
       </p:sp>
       <p:sp>
         <p:nvSpPr>
@@ -12064,7 +11487,7 @@
           <a:bodyPr wrap="square" lIns="0" tIns="0" rIns="0" bIns="0" rtlCol="0" anchor="ctr"/>
           <a:lstStyle/>
           <a:p>
-            <a:pPr marL="0" indent="0" algn="ctr">
+            <a:pPr algn="ctr" indent="0" marL="0">
               <a:buNone/>
             </a:pPr>
             <a:r>
@@ -12101,13 +11524,6 @@
           </a:solidFill>
           <a:ln/>
         </p:spPr>
-        <p:txBody>
-          <a:bodyPr/>
-          <a:lstStyle/>
-          <a:p>
-            <a:endParaRPr lang="en-US"/>
-          </a:p>
-        </p:txBody>
       </p:sp>
       <p:sp>
         <p:nvSpPr>
@@ -12130,7 +11546,7 @@
           <a:bodyPr wrap="square" lIns="0" tIns="0" rIns="0" bIns="0" rtlCol="0" anchor="ctr"/>
           <a:lstStyle/>
           <a:p>
-            <a:pPr marL="0" indent="0" algn="ctr">
+            <a:pPr algn="ctr" indent="0" marL="0">
               <a:buNone/>
             </a:pPr>
             <a:r>
@@ -12167,13 +11583,6 @@
           </a:solidFill>
           <a:ln/>
         </p:spPr>
-        <p:txBody>
-          <a:bodyPr/>
-          <a:lstStyle/>
-          <a:p>
-            <a:endParaRPr lang="en-US"/>
-          </a:p>
-        </p:txBody>
       </p:sp>
       <p:sp>
         <p:nvSpPr>
@@ -12196,7 +11605,7 @@
           <a:bodyPr wrap="square" lIns="0" tIns="0" rIns="0" bIns="0" rtlCol="0" anchor="ctr"/>
           <a:lstStyle/>
           <a:p>
-            <a:pPr marL="0" indent="0" algn="ctr">
+            <a:pPr algn="ctr" indent="0" marL="0">
               <a:buNone/>
             </a:pPr>
             <a:r>
@@ -12233,13 +11642,6 @@
           </a:solidFill>
           <a:ln/>
         </p:spPr>
-        <p:txBody>
-          <a:bodyPr/>
-          <a:lstStyle/>
-          <a:p>
-            <a:endParaRPr lang="en-US"/>
-          </a:p>
-        </p:txBody>
       </p:sp>
       <p:sp>
         <p:nvSpPr>
@@ -12262,7 +11664,7 @@
           <a:bodyPr wrap="square" lIns="0" tIns="0" rIns="0" bIns="0" rtlCol="0" anchor="ctr"/>
           <a:lstStyle/>
           <a:p>
-            <a:pPr marL="0" indent="0" algn="ctr">
+            <a:pPr algn="ctr" indent="0" marL="0">
               <a:buNone/>
             </a:pPr>
             <a:r>
@@ -12299,13 +11701,6 @@
           </a:solidFill>
           <a:ln/>
         </p:spPr>
-        <p:txBody>
-          <a:bodyPr/>
-          <a:lstStyle/>
-          <a:p>
-            <a:endParaRPr lang="en-US"/>
-          </a:p>
-        </p:txBody>
       </p:sp>
       <p:sp>
         <p:nvSpPr>
@@ -12328,7 +11723,7 @@
           <a:bodyPr wrap="square" lIns="0" tIns="0" rIns="0" bIns="0" rtlCol="0" anchor="ctr"/>
           <a:lstStyle/>
           <a:p>
-            <a:pPr marL="0" indent="0" algn="ctr">
+            <a:pPr algn="ctr" indent="0" marL="0">
               <a:buNone/>
             </a:pPr>
             <a:r>
@@ -12365,13 +11760,6 @@
           </a:solidFill>
           <a:ln/>
         </p:spPr>
-        <p:txBody>
-          <a:bodyPr/>
-          <a:lstStyle/>
-          <a:p>
-            <a:endParaRPr lang="en-US"/>
-          </a:p>
-        </p:txBody>
       </p:sp>
       <p:sp>
         <p:nvSpPr>
@@ -12394,7 +11782,7 @@
           <a:bodyPr wrap="square" lIns="0" tIns="0" rIns="0" bIns="0" rtlCol="0" anchor="ctr"/>
           <a:lstStyle/>
           <a:p>
-            <a:pPr marL="0" indent="0">
+            <a:pPr indent="0" marL="0">
               <a:buNone/>
             </a:pPr>
             <a:r>
@@ -12406,7 +11794,7 @@
                 <a:ea typeface="Arial" pitchFamily="34" charset="-122"/>
                 <a:cs typeface="Arial" pitchFamily="34" charset="-120"/>
               </a:rPr>
-              <a:t>So-what</a:t>
+              <a:t>Note</a:t>
             </a:r>
             <a:endParaRPr lang="en-US" sz="1300" dirty="0"/>
           </a:p>
@@ -12433,7 +11821,7 @@
           <a:bodyPr wrap="square" lIns="0" tIns="0" rIns="0" bIns="0" rtlCol="0" anchor="ctr"/>
           <a:lstStyle/>
           <a:p>
-            <a:pPr marL="0" indent="0">
+            <a:pPr indent="0" marL="0">
               <a:buNone/>
             </a:pPr>
             <a:r>
@@ -12445,7 +11833,7 @@
                 <a:ea typeface="Calibri" pitchFamily="34" charset="-122"/>
                 <a:cs typeface="Calibri" pitchFamily="34" charset="-120"/>
               </a:rPr>
-              <a:t>Critic rejects the infeasible crane plan (PLAN-X). Uncertainty scenario intentionally leaves residual risk visible — partial recovery under incomplete data, not false precision.</a:t>
+              <a:t>Critic rejects PLAN-X in the crane scenario (capacity does not exist). The uncertainty run saves 5 of 12 on purpose — we show partial recovery when data is bad, not a perfect score.</a:t>
             </a:r>
             <a:endParaRPr lang="en-US" sz="1300" dirty="0"/>
           </a:p>
@@ -12472,7 +11860,7 @@
           <a:bodyPr wrap="square" lIns="0" tIns="0" rIns="0" bIns="0" rtlCol="0" anchor="ctr"/>
           <a:lstStyle/>
           <a:p>
-            <a:pPr marL="0" indent="0">
+            <a:pPr indent="0" marL="0">
               <a:buNone/>
             </a:pPr>
             <a:r>
@@ -12511,7 +11899,7 @@
           <a:bodyPr wrap="square" lIns="0" tIns="0" rIns="0" bIns="0" rtlCol="0" anchor="ctr"/>
           <a:lstStyle/>
           <a:p>
-            <a:pPr marL="0" indent="0" algn="r">
+            <a:pPr algn="r" indent="0" marL="0">
               <a:buNone/>
             </a:pPr>
             <a:r>
@@ -12573,13 +11961,6 @@
           </a:solidFill>
           <a:ln/>
         </p:spPr>
-        <p:txBody>
-          <a:bodyPr/>
-          <a:lstStyle/>
-          <a:p>
-            <a:endParaRPr lang="en-US"/>
-          </a:p>
-        </p:txBody>
       </p:sp>
       <p:sp>
         <p:nvSpPr>
@@ -12602,7 +11983,7 @@
           <a:bodyPr wrap="square" lIns="0" tIns="0" rIns="0" bIns="0" rtlCol="0" anchor="t"/>
           <a:lstStyle/>
           <a:p>
-            <a:pPr marL="0" indent="0">
+            <a:pPr indent="0" marL="0">
               <a:buNone/>
             </a:pPr>
             <a:r>
@@ -12614,7 +11995,7 @@
                 <a:ea typeface="Arial" pitchFamily="34" charset="-122"/>
                 <a:cs typeface="Arial" pitchFamily="34" charset="-120"/>
               </a:rPr>
-              <a:t>Uncertainty and tool failure are first-class paths — no silent improvisation</a:t>
+              <a:t>When tools fail or data is stale, RELAY retries, falls back, or escalates</a:t>
             </a:r>
             <a:endParaRPr lang="en-US" sz="1800" dirty="0"/>
           </a:p>
@@ -12639,13 +12020,6 @@
           </a:solidFill>
           <a:ln/>
         </p:spPr>
-        <p:txBody>
-          <a:bodyPr/>
-          <a:lstStyle/>
-          <a:p>
-            <a:endParaRPr lang="en-US"/>
-          </a:p>
-        </p:txBody>
       </p:sp>
       <p:sp>
         <p:nvSpPr>
@@ -12668,7 +12042,7 @@
           <a:bodyPr wrap="square" lIns="0" tIns="0" rIns="0" bIns="0" rtlCol="0" anchor="ctr"/>
           <a:lstStyle/>
           <a:p>
-            <a:pPr marL="0" indent="0">
+            <a:pPr indent="0" marL="0">
               <a:buNone/>
             </a:pPr>
             <a:r>
@@ -12707,7 +12081,7 @@
           <a:bodyPr wrap="square" lIns="0" tIns="0" rIns="0" bIns="0" rtlCol="0" anchor="ctr"/>
           <a:lstStyle/>
           <a:p>
-            <a:pPr marL="0" indent="0">
+            <a:pPr indent="0" marL="0">
               <a:buNone/>
             </a:pPr>
             <a:r>
@@ -12744,13 +12118,6 @@
           </a:solidFill>
           <a:ln/>
         </p:spPr>
-        <p:txBody>
-          <a:bodyPr/>
-          <a:lstStyle/>
-          <a:p>
-            <a:endParaRPr lang="en-US"/>
-          </a:p>
-        </p:txBody>
       </p:sp>
       <p:sp>
         <p:nvSpPr>
@@ -12773,7 +12140,7 @@
           <a:bodyPr wrap="square" lIns="0" tIns="0" rIns="0" bIns="0" rtlCol="0" anchor="ctr"/>
           <a:lstStyle/>
           <a:p>
-            <a:pPr marL="0" indent="0">
+            <a:pPr indent="0" marL="0">
               <a:buNone/>
             </a:pPr>
             <a:r>
@@ -12812,7 +12179,7 @@
           <a:bodyPr wrap="square" lIns="0" tIns="0" rIns="0" bIns="0" rtlCol="0" anchor="ctr"/>
           <a:lstStyle/>
           <a:p>
-            <a:pPr marL="0" indent="0">
+            <a:pPr indent="0" marL="0">
               <a:buNone/>
             </a:pPr>
             <a:r>
@@ -12849,13 +12216,6 @@
           </a:solidFill>
           <a:ln/>
         </p:spPr>
-        <p:txBody>
-          <a:bodyPr/>
-          <a:lstStyle/>
-          <a:p>
-            <a:endParaRPr lang="en-US"/>
-          </a:p>
-        </p:txBody>
       </p:sp>
       <p:sp>
         <p:nvSpPr>
@@ -12878,7 +12238,7 @@
           <a:bodyPr wrap="square" lIns="0" tIns="0" rIns="0" bIns="0" rtlCol="0" anchor="ctr"/>
           <a:lstStyle/>
           <a:p>
-            <a:pPr marL="0" indent="0">
+            <a:pPr indent="0" marL="0">
               <a:buNone/>
             </a:pPr>
             <a:r>
@@ -12917,7 +12277,7 @@
           <a:bodyPr wrap="square" lIns="0" tIns="0" rIns="0" bIns="0" rtlCol="0" anchor="ctr"/>
           <a:lstStyle/>
           <a:p>
-            <a:pPr marL="0" indent="0">
+            <a:pPr indent="0" marL="0">
               <a:buNone/>
             </a:pPr>
             <a:r>
@@ -12954,13 +12314,6 @@
           </a:solidFill>
           <a:ln/>
         </p:spPr>
-        <p:txBody>
-          <a:bodyPr/>
-          <a:lstStyle/>
-          <a:p>
-            <a:endParaRPr lang="en-US"/>
-          </a:p>
-        </p:txBody>
       </p:sp>
       <p:sp>
         <p:nvSpPr>
@@ -12983,7 +12336,7 @@
           <a:bodyPr wrap="square" lIns="0" tIns="0" rIns="0" bIns="0" rtlCol="0" anchor="ctr"/>
           <a:lstStyle/>
           <a:p>
-            <a:pPr marL="0" indent="0">
+            <a:pPr indent="0" marL="0">
               <a:buNone/>
             </a:pPr>
             <a:r>
@@ -13022,7 +12375,7 @@
           <a:bodyPr wrap="square" lIns="0" tIns="0" rIns="0" bIns="0" rtlCol="0" anchor="ctr"/>
           <a:lstStyle/>
           <a:p>
-            <a:pPr marL="0" indent="0">
+            <a:pPr indent="0" marL="0">
               <a:buNone/>
             </a:pPr>
             <a:r>
@@ -13059,13 +12412,6 @@
           </a:solidFill>
           <a:ln/>
         </p:spPr>
-        <p:txBody>
-          <a:bodyPr/>
-          <a:lstStyle/>
-          <a:p>
-            <a:endParaRPr lang="en-US"/>
-          </a:p>
-        </p:txBody>
       </p:sp>
       <p:sp>
         <p:nvSpPr>
@@ -13088,7 +12434,7 @@
           <a:bodyPr wrap="square" lIns="0" tIns="0" rIns="0" bIns="0" rtlCol="0" anchor="ctr"/>
           <a:lstStyle/>
           <a:p>
-            <a:pPr marL="0" indent="0">
+            <a:pPr indent="0" marL="0">
               <a:buNone/>
             </a:pPr>
             <a:r>
@@ -13127,7 +12473,7 @@
           <a:bodyPr wrap="square" lIns="0" tIns="0" rIns="0" bIns="0" rtlCol="0" anchor="ctr"/>
           <a:lstStyle/>
           <a:p>
-            <a:pPr marL="0" indent="0">
+            <a:pPr indent="0" marL="0">
               <a:buNone/>
             </a:pPr>
             <a:r>
@@ -13164,13 +12510,6 @@
           </a:solidFill>
           <a:ln/>
         </p:spPr>
-        <p:txBody>
-          <a:bodyPr/>
-          <a:lstStyle/>
-          <a:p>
-            <a:endParaRPr lang="en-US"/>
-          </a:p>
-        </p:txBody>
       </p:sp>
       <p:sp>
         <p:nvSpPr>
@@ -13193,7 +12532,7 @@
           <a:bodyPr wrap="square" lIns="0" tIns="0" rIns="0" bIns="0" rtlCol="0" anchor="ctr"/>
           <a:lstStyle/>
           <a:p>
-            <a:pPr marL="0" indent="0">
+            <a:pPr indent="0" marL="0">
               <a:buNone/>
             </a:pPr>
             <a:r>
@@ -13232,7 +12571,7 @@
           <a:bodyPr wrap="square" lIns="0" tIns="0" rIns="0" bIns="0" rtlCol="0" anchor="ctr"/>
           <a:lstStyle/>
           <a:p>
-            <a:pPr marL="0" indent="0">
+            <a:pPr indent="0" marL="0">
               <a:buNone/>
             </a:pPr>
             <a:r>
@@ -13271,7 +12610,7 @@
           <a:bodyPr wrap="square" lIns="0" tIns="0" rIns="0" bIns="0" rtlCol="0" anchor="ctr"/>
           <a:lstStyle/>
           <a:p>
-            <a:pPr marL="0" indent="0">
+            <a:pPr indent="0" marL="0">
               <a:buNone/>
             </a:pPr>
             <a:r>
@@ -13310,7 +12649,7 @@
           <a:bodyPr wrap="square" lIns="0" tIns="0" rIns="0" bIns="0" rtlCol="0" anchor="ctr"/>
           <a:lstStyle/>
           <a:p>
-            <a:pPr marL="0" indent="0" algn="r">
+            <a:pPr algn="r" indent="0" marL="0">
               <a:buNone/>
             </a:pPr>
             <a:r>
@@ -13372,13 +12711,6 @@
           </a:solidFill>
           <a:ln/>
         </p:spPr>
-        <p:txBody>
-          <a:bodyPr/>
-          <a:lstStyle/>
-          <a:p>
-            <a:endParaRPr lang="en-US"/>
-          </a:p>
-        </p:txBody>
       </p:sp>
       <p:sp>
         <p:nvSpPr>
@@ -13401,7 +12733,7 @@
           <a:bodyPr wrap="square" lIns="0" tIns="0" rIns="0" bIns="0" rtlCol="0" anchor="t"/>
           <a:lstStyle/>
           <a:p>
-            <a:pPr marL="0" indent="0">
+            <a:pPr indent="0" marL="0">
               <a:buNone/>
             </a:pPr>
             <a:r>
@@ -13413,7 +12745,7 @@
                 <a:ea typeface="Arial" pitchFamily="34" charset="-122"/>
                 <a:cs typeface="Arial" pitchFamily="34" charset="-120"/>
               </a:rPr>
-              <a:t>Near-term impact is measurable; Sprinternship binds the same contracts to terminal systems</a:t>
+              <a:t>Next step: shadow mode with PSA mentors, then real terminal APIs</a:t>
             </a:r>
             <a:endParaRPr lang="en-US" sz="1800" dirty="0"/>
           </a:p>
@@ -13438,13 +12770,6 @@
           </a:solidFill>
           <a:ln/>
         </p:spPr>
-        <p:txBody>
-          <a:bodyPr/>
-          <a:lstStyle/>
-          <a:p>
-            <a:endParaRPr lang="en-US"/>
-          </a:p>
-        </p:txBody>
       </p:sp>
       <p:sp>
         <p:nvSpPr>
@@ -13467,7 +12792,7 @@
           <a:bodyPr wrap="square" lIns="0" tIns="0" rIns="0" bIns="0" rtlCol="0" anchor="ctr"/>
           <a:lstStyle/>
           <a:p>
-            <a:pPr marL="0" indent="0" algn="ctr">
+            <a:pPr algn="ctr" indent="0" marL="0">
               <a:buNone/>
             </a:pPr>
             <a:r>
@@ -13504,13 +12829,6 @@
           </a:solidFill>
           <a:ln/>
         </p:spPr>
-        <p:txBody>
-          <a:bodyPr/>
-          <a:lstStyle/>
-          <a:p>
-            <a:endParaRPr lang="en-US"/>
-          </a:p>
-        </p:txBody>
       </p:sp>
       <p:sp>
         <p:nvSpPr>
@@ -13533,7 +12851,7 @@
           <a:bodyPr wrap="square" lIns="0" tIns="0" rIns="0" bIns="0" rtlCol="0" anchor="ctr"/>
           <a:lstStyle/>
           <a:p>
-            <a:pPr marL="0" indent="0">
+            <a:pPr indent="0" marL="0">
               <a:buNone/>
             </a:pPr>
             <a:r>
@@ -13572,7 +12890,7 @@
           <a:bodyPr wrap="square" lIns="0" tIns="0" rIns="0" bIns="0" rtlCol="0" anchor="ctr"/>
           <a:lstStyle/>
           <a:p>
-            <a:pPr marL="0" indent="0">
+            <a:pPr indent="0" marL="0">
               <a:buNone/>
             </a:pPr>
             <a:r>
@@ -13609,13 +12927,6 @@
           </a:solidFill>
           <a:ln/>
         </p:spPr>
-        <p:txBody>
-          <a:bodyPr/>
-          <a:lstStyle/>
-          <a:p>
-            <a:endParaRPr lang="en-US"/>
-          </a:p>
-        </p:txBody>
       </p:sp>
       <p:sp>
         <p:nvSpPr>
@@ -13638,7 +12949,7 @@
           <a:bodyPr wrap="square" lIns="0" tIns="0" rIns="0" bIns="0" rtlCol="0" anchor="ctr"/>
           <a:lstStyle/>
           <a:p>
-            <a:pPr marL="0" indent="0" algn="ctr">
+            <a:pPr algn="ctr" indent="0" marL="0">
               <a:buNone/>
             </a:pPr>
             <a:r>
@@ -13675,13 +12986,6 @@
           </a:solidFill>
           <a:ln/>
         </p:spPr>
-        <p:txBody>
-          <a:bodyPr/>
-          <a:lstStyle/>
-          <a:p>
-            <a:endParaRPr lang="en-US"/>
-          </a:p>
-        </p:txBody>
       </p:sp>
       <p:sp>
         <p:nvSpPr>
@@ -13704,7 +13008,7 @@
           <a:bodyPr wrap="square" lIns="0" tIns="0" rIns="0" bIns="0" rtlCol="0" anchor="ctr"/>
           <a:lstStyle/>
           <a:p>
-            <a:pPr marL="0" indent="0">
+            <a:pPr indent="0" marL="0">
               <a:buNone/>
             </a:pPr>
             <a:r>
@@ -13743,7 +13047,7 @@
           <a:bodyPr wrap="square" lIns="0" tIns="0" rIns="0" bIns="0" rtlCol="0" anchor="ctr"/>
           <a:lstStyle/>
           <a:p>
-            <a:pPr marL="0" indent="0">
+            <a:pPr indent="0" marL="0">
               <a:buNone/>
             </a:pPr>
             <a:r>
@@ -13780,13 +13084,6 @@
           </a:solidFill>
           <a:ln/>
         </p:spPr>
-        <p:txBody>
-          <a:bodyPr/>
-          <a:lstStyle/>
-          <a:p>
-            <a:endParaRPr lang="en-US"/>
-          </a:p>
-        </p:txBody>
       </p:sp>
       <p:sp>
         <p:nvSpPr>
@@ -13809,7 +13106,7 @@
           <a:bodyPr wrap="square" lIns="0" tIns="0" rIns="0" bIns="0" rtlCol="0" anchor="ctr"/>
           <a:lstStyle/>
           <a:p>
-            <a:pPr marL="0" indent="0" algn="ctr">
+            <a:pPr algn="ctr" indent="0" marL="0">
               <a:buNone/>
             </a:pPr>
             <a:r>
@@ -13846,13 +13143,6 @@
           </a:solidFill>
           <a:ln/>
         </p:spPr>
-        <p:txBody>
-          <a:bodyPr/>
-          <a:lstStyle/>
-          <a:p>
-            <a:endParaRPr lang="en-US"/>
-          </a:p>
-        </p:txBody>
       </p:sp>
       <p:sp>
         <p:nvSpPr>
@@ -13875,7 +13165,7 @@
           <a:bodyPr wrap="square" lIns="0" tIns="0" rIns="0" bIns="0" rtlCol="0" anchor="ctr"/>
           <a:lstStyle/>
           <a:p>
-            <a:pPr marL="0" indent="0">
+            <a:pPr indent="0" marL="0">
               <a:buNone/>
             </a:pPr>
             <a:r>
@@ -13914,7 +13204,7 @@
           <a:bodyPr wrap="square" lIns="0" tIns="0" rIns="0" bIns="0" rtlCol="0" anchor="ctr"/>
           <a:lstStyle/>
           <a:p>
-            <a:pPr marL="0" indent="0">
+            <a:pPr indent="0" marL="0">
               <a:buNone/>
             </a:pPr>
             <a:r>
@@ -13953,7 +13243,7 @@
           <a:bodyPr wrap="square" lIns="0" tIns="0" rIns="0" bIns="0" rtlCol="0" anchor="ctr"/>
           <a:lstStyle/>
           <a:p>
-            <a:pPr marL="0" indent="0">
+            <a:pPr indent="0" marL="0">
               <a:buNone/>
             </a:pPr>
             <a:r>
@@ -13992,7 +13282,7 @@
           <a:bodyPr wrap="square" lIns="0" tIns="0" rIns="0" bIns="0" rtlCol="0" anchor="ctr"/>
           <a:lstStyle/>
           <a:p>
-            <a:pPr marL="0" indent="0" algn="r">
+            <a:pPr algn="r" indent="0" marL="0">
               <a:buNone/>
             </a:pPr>
             <a:r>
@@ -14311,319 +13601,4 @@
     </a:ext>
   </a:extLst>
 </a:theme>
-</file>
-
-<file path=ppt/theme/theme2.xml><?xml version="1.0" encoding="utf-8"?>
-<a:theme xmlns:a="http://schemas.openxmlformats.org/drawingml/2006/main" name="Office Theme">
-  <a:themeElements>
-    <a:clrScheme name="Office">
-      <a:dk1>
-        <a:sysClr val="windowText" lastClr="000000"/>
-      </a:dk1>
-      <a:lt1>
-        <a:sysClr val="window" lastClr="FFFFFF"/>
-      </a:lt1>
-      <a:dk2>
-        <a:srgbClr val="0E2841"/>
-      </a:dk2>
-      <a:lt2>
-        <a:srgbClr val="E8E8E8"/>
-      </a:lt2>
-      <a:accent1>
-        <a:srgbClr val="156082"/>
-      </a:accent1>
-      <a:accent2>
-        <a:srgbClr val="E97132"/>
-      </a:accent2>
-      <a:accent3>
-        <a:srgbClr val="196B24"/>
-      </a:accent3>
-      <a:accent4>
-        <a:srgbClr val="0F9ED5"/>
-      </a:accent4>
-      <a:accent5>
-        <a:srgbClr val="A02B93"/>
-      </a:accent5>
-      <a:accent6>
-        <a:srgbClr val="4EA72E"/>
-      </a:accent6>
-      <a:hlink>
-        <a:srgbClr val="467886"/>
-      </a:hlink>
-      <a:folHlink>
-        <a:srgbClr val="96607D"/>
-      </a:folHlink>
-    </a:clrScheme>
-    <a:fontScheme name="Office">
-      <a:majorFont>
-        <a:latin typeface="Aptos Display" panose="02110004020202020204"/>
-        <a:ea typeface=""/>
-        <a:cs typeface=""/>
-        <a:font script="Jpan" typeface="游ゴシック Light"/>
-        <a:font script="Hang" typeface="맑은 고딕"/>
-        <a:font script="Hans" typeface="等线 Light"/>
-        <a:font script="Hant" typeface="新細明體"/>
-        <a:font script="Arab" typeface="Times New Roman"/>
-        <a:font script="Hebr" typeface="Times New Roman"/>
-        <a:font script="Thai" typeface="Angsana New"/>
-        <a:font script="Ethi" typeface="Nyala"/>
-        <a:font script="Beng" typeface="Vrinda"/>
-        <a:font script="Gujr" typeface="Shruti"/>
-        <a:font script="Khmr" typeface="MoolBoran"/>
-        <a:font script="Knda" typeface="Tunga"/>
-        <a:font script="Guru" typeface="Raavi"/>
-        <a:font script="Cans" typeface="Euphemia"/>
-        <a:font script="Cher" typeface="Plantagenet Cherokee"/>
-        <a:font script="Yiii" typeface="Microsoft Yi Baiti"/>
-        <a:font script="Tibt" typeface="Microsoft Himalaya"/>
-        <a:font script="Thaa" typeface="MV Boli"/>
-        <a:font script="Deva" typeface="Mangal"/>
-        <a:font script="Telu" typeface="Gautami"/>
-        <a:font script="Taml" typeface="Latha"/>
-        <a:font script="Syrc" typeface="Estrangelo Edessa"/>
-        <a:font script="Orya" typeface="Kalinga"/>
-        <a:font script="Mlym" typeface="Kartika"/>
-        <a:font script="Laoo" typeface="DokChampa"/>
-        <a:font script="Sinh" typeface="Iskoola Pota"/>
-        <a:font script="Mong" typeface="Mongolian Baiti"/>
-        <a:font script="Viet" typeface="Times New Roman"/>
-        <a:font script="Uigh" typeface="Microsoft Uighur"/>
-        <a:font script="Geor" typeface="Sylfaen"/>
-        <a:font script="Armn" typeface="Arial"/>
-        <a:font script="Bugi" typeface="Leelawadee UI"/>
-        <a:font script="Bopo" typeface="Microsoft JhengHei"/>
-        <a:font script="Java" typeface="Javanese Text"/>
-        <a:font script="Lisu" typeface="Segoe UI"/>
-        <a:font script="Mymr" typeface="Myanmar Text"/>
-        <a:font script="Nkoo" typeface="Ebrima"/>
-        <a:font script="Olck" typeface="Nirmala UI"/>
-        <a:font script="Osma" typeface="Ebrima"/>
-        <a:font script="Phag" typeface="Phagspa"/>
-        <a:font script="Syrn" typeface="Estrangelo Edessa"/>
-        <a:font script="Syrj" typeface="Estrangelo Edessa"/>
-        <a:font script="Syre" typeface="Estrangelo Edessa"/>
-        <a:font script="Sora" typeface="Nirmala UI"/>
-        <a:font script="Tale" typeface="Microsoft Tai Le"/>
-        <a:font script="Talu" typeface="Microsoft New Tai Lue"/>
-        <a:font script="Tfng" typeface="Ebrima"/>
-      </a:majorFont>
-      <a:minorFont>
-        <a:latin typeface="Aptos" panose="02110004020202020204"/>
-        <a:ea typeface=""/>
-        <a:cs typeface=""/>
-        <a:font script="Jpan" typeface="游ゴシック"/>
-        <a:font script="Hang" typeface="맑은 고딕"/>
-        <a:font script="Hans" typeface="等线"/>
-        <a:font script="Hant" typeface="新細明體"/>
-        <a:font script="Arab" typeface="Arial"/>
-        <a:font script="Hebr" typeface="Arial"/>
-        <a:font script="Thai" typeface="Cordia New"/>
-        <a:font script="Ethi" typeface="Nyala"/>
-        <a:font script="Beng" typeface="Vrinda"/>
-        <a:font script="Gujr" typeface="Shruti"/>
-        <a:font script="Khmr" typeface="DaunPenh"/>
-        <a:font script="Knda" typeface="Tunga"/>
-        <a:font script="Guru" typeface="Raavi"/>
-        <a:font script="Cans" typeface="Euphemia"/>
-        <a:font script="Cher" typeface="Plantagenet Cherokee"/>
-        <a:font script="Yiii" typeface="Microsoft Yi Baiti"/>
-        <a:font script="Tibt" typeface="Microsoft Himalaya"/>
-        <a:font script="Thaa" typeface="MV Boli"/>
-        <a:font script="Deva" typeface="Mangal"/>
-        <a:font script="Telu" typeface="Gautami"/>
-        <a:font script="Taml" typeface="Latha"/>
-        <a:font script="Syrc" typeface="Estrangelo Edessa"/>
-        <a:font script="Orya" typeface="Kalinga"/>
-        <a:font script="Mlym" typeface="Kartika"/>
-        <a:font script="Laoo" typeface="DokChampa"/>
-        <a:font script="Sinh" typeface="Iskoola Pota"/>
-        <a:font script="Mong" typeface="Mongolian Baiti"/>
-        <a:font script="Viet" typeface="Arial"/>
-        <a:font script="Uigh" typeface="Microsoft Uighur"/>
-        <a:font script="Geor" typeface="Sylfaen"/>
-        <a:font script="Armn" typeface="Arial"/>
-        <a:font script="Bugi" typeface="Leelawadee UI"/>
-        <a:font script="Bopo" typeface="Microsoft JhengHei"/>
-        <a:font script="Java" typeface="Javanese Text"/>
-        <a:font script="Lisu" typeface="Segoe UI"/>
-        <a:font script="Mymr" typeface="Myanmar Text"/>
-        <a:font script="Nkoo" typeface="Ebrima"/>
-        <a:font script="Olck" typeface="Nirmala UI"/>
-        <a:font script="Osma" typeface="Ebrima"/>
-        <a:font script="Phag" typeface="Phagspa"/>
-        <a:font script="Syrn" typeface="Estrangelo Edessa"/>
-        <a:font script="Syrj" typeface="Estrangelo Edessa"/>
-        <a:font script="Syre" typeface="Estrangelo Edessa"/>
-        <a:font script="Sora" typeface="Nirmala UI"/>
-        <a:font script="Tale" typeface="Microsoft Tai Le"/>
-        <a:font script="Talu" typeface="Microsoft New Tai Lue"/>
-        <a:font script="Tfng" typeface="Ebrima"/>
-      </a:minorFont>
-    </a:fontScheme>
-    <a:fmtScheme name="Office">
-      <a:fillStyleLst>
-        <a:solidFill>
-          <a:schemeClr val="phClr"/>
-        </a:solidFill>
-        <a:gradFill rotWithShape="1">
-          <a:gsLst>
-            <a:gs pos="0">
-              <a:schemeClr val="phClr">
-                <a:lumMod val="110000"/>
-                <a:satMod val="105000"/>
-                <a:tint val="67000"/>
-              </a:schemeClr>
-            </a:gs>
-            <a:gs pos="50000">
-              <a:schemeClr val="phClr">
-                <a:lumMod val="105000"/>
-                <a:satMod val="103000"/>
-                <a:tint val="73000"/>
-              </a:schemeClr>
-            </a:gs>
-            <a:gs pos="100000">
-              <a:schemeClr val="phClr">
-                <a:lumMod val="105000"/>
-                <a:satMod val="109000"/>
-                <a:tint val="81000"/>
-              </a:schemeClr>
-            </a:gs>
-          </a:gsLst>
-          <a:lin ang="5400000" scaled="0"/>
-        </a:gradFill>
-        <a:gradFill rotWithShape="1">
-          <a:gsLst>
-            <a:gs pos="0">
-              <a:schemeClr val="phClr">
-                <a:satMod val="103000"/>
-                <a:lumMod val="102000"/>
-                <a:tint val="94000"/>
-              </a:schemeClr>
-            </a:gs>
-            <a:gs pos="50000">
-              <a:schemeClr val="phClr">
-                <a:satMod val="110000"/>
-                <a:lumMod val="100000"/>
-                <a:shade val="100000"/>
-              </a:schemeClr>
-            </a:gs>
-            <a:gs pos="100000">
-              <a:schemeClr val="phClr">
-                <a:lumMod val="99000"/>
-                <a:satMod val="120000"/>
-                <a:shade val="78000"/>
-              </a:schemeClr>
-            </a:gs>
-          </a:gsLst>
-          <a:lin ang="5400000" scaled="0"/>
-        </a:gradFill>
-      </a:fillStyleLst>
-      <a:lnStyleLst>
-        <a:ln w="12700" cap="flat" cmpd="sng" algn="ctr">
-          <a:solidFill>
-            <a:schemeClr val="phClr"/>
-          </a:solidFill>
-          <a:prstDash val="solid"/>
-          <a:miter lim="800000"/>
-        </a:ln>
-        <a:ln w="19050" cap="flat" cmpd="sng" algn="ctr">
-          <a:solidFill>
-            <a:schemeClr val="phClr"/>
-          </a:solidFill>
-          <a:prstDash val="solid"/>
-          <a:miter lim="800000"/>
-        </a:ln>
-        <a:ln w="25400" cap="flat" cmpd="sng" algn="ctr">
-          <a:solidFill>
-            <a:schemeClr val="phClr"/>
-          </a:solidFill>
-          <a:prstDash val="solid"/>
-          <a:miter lim="800000"/>
-        </a:ln>
-      </a:lnStyleLst>
-      <a:effectStyleLst>
-        <a:effectStyle>
-          <a:effectLst/>
-        </a:effectStyle>
-        <a:effectStyle>
-          <a:effectLst/>
-        </a:effectStyle>
-        <a:effectStyle>
-          <a:effectLst>
-            <a:outerShdw blurRad="57150" dist="19050" dir="5400000" algn="ctr" rotWithShape="0">
-              <a:srgbClr val="000000">
-                <a:alpha val="63000"/>
-              </a:srgbClr>
-            </a:outerShdw>
-          </a:effectLst>
-        </a:effectStyle>
-      </a:effectStyleLst>
-      <a:bgFillStyleLst>
-        <a:solidFill>
-          <a:schemeClr val="phClr"/>
-        </a:solidFill>
-        <a:solidFill>
-          <a:schemeClr val="phClr">
-            <a:tint val="95000"/>
-            <a:satMod val="170000"/>
-          </a:schemeClr>
-        </a:solidFill>
-        <a:gradFill rotWithShape="1">
-          <a:gsLst>
-            <a:gs pos="0">
-              <a:schemeClr val="phClr">
-                <a:tint val="93000"/>
-                <a:satMod val="150000"/>
-                <a:shade val="98000"/>
-                <a:lumMod val="102000"/>
-              </a:schemeClr>
-            </a:gs>
-            <a:gs pos="50000">
-              <a:schemeClr val="phClr">
-                <a:tint val="98000"/>
-                <a:satMod val="130000"/>
-                <a:shade val="90000"/>
-                <a:lumMod val="103000"/>
-              </a:schemeClr>
-            </a:gs>
-            <a:gs pos="100000">
-              <a:schemeClr val="phClr">
-                <a:shade val="63000"/>
-                <a:satMod val="120000"/>
-              </a:schemeClr>
-            </a:gs>
-          </a:gsLst>
-          <a:lin ang="5400000" scaled="0"/>
-        </a:gradFill>
-      </a:bgFillStyleLst>
-    </a:fmtScheme>
-  </a:themeElements>
-  <a:objectDefaults>
-    <a:lnDef>
-      <a:spPr/>
-      <a:bodyPr/>
-      <a:lstStyle/>
-      <a:style>
-        <a:lnRef idx="2">
-          <a:schemeClr val="accent1"/>
-        </a:lnRef>
-        <a:fillRef idx="0">
-          <a:schemeClr val="accent1"/>
-        </a:fillRef>
-        <a:effectRef idx="1">
-          <a:schemeClr val="accent1"/>
-        </a:effectRef>
-        <a:fontRef idx="minor">
-          <a:schemeClr val="tx1"/>
-        </a:fontRef>
-      </a:style>
-    </a:lnDef>
-  </a:objectDefaults>
-  <a:extraClrSchemeLst/>
-  <a:extLst>
-    <a:ext uri="{05A4C25C-085E-4340-85A3-A5531E510DB2}">
-      <thm15:themeFamily xmlns:thm15="http://schemas.microsoft.com/office/thememl/2012/main" name="Office Theme" id="{2E142A2C-CD16-42D6-873A-C26D2A0506FA}" vid="{1BDDFF52-6CD6-40A5-AB3C-68EB2F1E4D0A}"/>
-    </a:ext>
-  </a:extLst>
-</a:theme>
 </file>